--- a/ADG/_실측판/09장/9장_ActiveDataGuard_실시간조회와DML리다이렉션.pptx
+++ b/ADG/_실측판/09장/9장_ActiveDataGuard_실시간조회와DML리다이렉션.pptx
@@ -5687,7 +5687,73 @@
                 </a:solidFill>
                 <a:latin typeface="맑은 고딕"/>
               </a:rPr>
-              <a:t>•  `INSERT` 후 `COMMIT` 없이 `EXIT` → Standby 에서 **보였다**</a:t>
+              <a:t>•  </a:t>
+            </a:r>
+            <a:r>
+              <a:rPr sz="1700" b="0">
+                <a:solidFill>
+                  <a:srgbClr val="222222"/>
+                </a:solidFill>
+                <a:latin typeface="Consolas"/>
+                <a:cs typeface="Consolas"/>
+              </a:rPr>
+              <a:t>INSERT</a:t>
+            </a:r>
+            <a:r>
+              <a:rPr sz="1700" b="0">
+                <a:solidFill>
+                  <a:srgbClr val="222222"/>
+                </a:solidFill>
+                <a:latin typeface="맑은 고딕"/>
+              </a:rPr>
+              <a:t> 후 </a:t>
+            </a:r>
+            <a:r>
+              <a:rPr sz="1700" b="0">
+                <a:solidFill>
+                  <a:srgbClr val="222222"/>
+                </a:solidFill>
+                <a:latin typeface="Consolas"/>
+                <a:cs typeface="Consolas"/>
+              </a:rPr>
+              <a:t>COMMIT</a:t>
+            </a:r>
+            <a:r>
+              <a:rPr sz="1700" b="0">
+                <a:solidFill>
+                  <a:srgbClr val="222222"/>
+                </a:solidFill>
+                <a:latin typeface="맑은 고딕"/>
+              </a:rPr>
+              <a:t> 없이 </a:t>
+            </a:r>
+            <a:r>
+              <a:rPr sz="1700" b="0">
+                <a:solidFill>
+                  <a:srgbClr val="222222"/>
+                </a:solidFill>
+                <a:latin typeface="Consolas"/>
+                <a:cs typeface="Consolas"/>
+              </a:rPr>
+              <a:t>EXIT</a:t>
+            </a:r>
+            <a:r>
+              <a:rPr sz="1700" b="0">
+                <a:solidFill>
+                  <a:srgbClr val="222222"/>
+                </a:solidFill>
+                <a:latin typeface="맑은 고딕"/>
+              </a:rPr>
+              <a:t> → Standby 에서 </a:t>
+            </a:r>
+            <a:r>
+              <a:rPr sz="1700" b="1">
+                <a:solidFill>
+                  <a:srgbClr val="222222"/>
+                </a:solidFill>
+                <a:latin typeface="맑은 고딕"/>
+              </a:rPr>
+              <a:t>보였다</a:t>
             </a:r>
           </a:p>
           <a:p>
@@ -5703,7 +5769,16 @@
                 </a:solidFill>
                 <a:latin typeface="맑은 고딕"/>
               </a:rPr>
-              <a:t>•  원인은 Data Guard 가 아니라 **SQL*Plus**</a:t>
+              <a:t>•  원인은 Data Guard 가 아니라 </a:t>
+            </a:r>
+            <a:r>
+              <a:rPr sz="1700" b="1">
+                <a:solidFill>
+                  <a:srgbClr val="222222"/>
+                </a:solidFill>
+                <a:latin typeface="맑은 고딕"/>
+              </a:rPr>
+              <a:t>SQL*Plus</a:t>
             </a:r>
           </a:p>
           <a:p>
@@ -5735,7 +5810,16 @@
                 </a:solidFill>
                 <a:latin typeface="맑은 고딕"/>
               </a:rPr>
-              <a:t>•  **"제품이 이상하다"보다 "내 측정이 이상하다"를 먼저 의심한다**</a:t>
+              <a:t>•  </a:t>
+            </a:r>
+            <a:r>
+              <a:rPr sz="1700" b="1">
+                <a:solidFill>
+                  <a:srgbClr val="222222"/>
+                </a:solidFill>
+                <a:latin typeface="맑은 고딕"/>
+              </a:rPr>
+              <a:t>"제품이 이상하다"보다 "내 측정이 이상하다"를 먼저 의심한다</a:t>
             </a:r>
           </a:p>
         </p:txBody>
@@ -6169,7 +6253,26 @@
                 </a:solidFill>
                 <a:latin typeface="맑은 고딕"/>
               </a:rPr>
-              <a:t>•  `INSERT` → ORA-16000</a:t>
+              <a:t>•  </a:t>
+            </a:r>
+            <a:r>
+              <a:rPr sz="1700" b="0">
+                <a:solidFill>
+                  <a:srgbClr val="222222"/>
+                </a:solidFill>
+                <a:latin typeface="Consolas"/>
+                <a:cs typeface="Consolas"/>
+              </a:rPr>
+              <a:t>INSERT</a:t>
+            </a:r>
+            <a:r>
+              <a:rPr sz="1700" b="0">
+                <a:solidFill>
+                  <a:srgbClr val="222222"/>
+                </a:solidFill>
+                <a:latin typeface="맑은 고딕"/>
+              </a:rPr>
+              <a:t> → ORA-16000</a:t>
             </a:r>
           </a:p>
           <a:p>
@@ -6185,7 +6288,26 @@
                 </a:solidFill>
                 <a:latin typeface="맑은 고딕"/>
               </a:rPr>
-              <a:t>•  `UPDATE` → ORA-16000</a:t>
+              <a:t>•  </a:t>
+            </a:r>
+            <a:r>
+              <a:rPr sz="1700" b="0">
+                <a:solidFill>
+                  <a:srgbClr val="222222"/>
+                </a:solidFill>
+                <a:latin typeface="Consolas"/>
+                <a:cs typeface="Consolas"/>
+              </a:rPr>
+              <a:t>UPDATE</a:t>
+            </a:r>
+            <a:r>
+              <a:rPr sz="1700" b="0">
+                <a:solidFill>
+                  <a:srgbClr val="222222"/>
+                </a:solidFill>
+                <a:latin typeface="맑은 고딕"/>
+              </a:rPr>
+              <a:t> → ORA-16000</a:t>
             </a:r>
           </a:p>
           <a:p>
@@ -6201,7 +6323,26 @@
                 </a:solidFill>
                 <a:latin typeface="맑은 고딕"/>
               </a:rPr>
-              <a:t>•  `CREATE TABLE` → ORA-16000</a:t>
+              <a:t>•  </a:t>
+            </a:r>
+            <a:r>
+              <a:rPr sz="1700" b="0">
+                <a:solidFill>
+                  <a:srgbClr val="222222"/>
+                </a:solidFill>
+                <a:latin typeface="Consolas"/>
+                <a:cs typeface="Consolas"/>
+              </a:rPr>
+              <a:t>CREATE TABLE</a:t>
+            </a:r>
+            <a:r>
+              <a:rPr sz="1700" b="0">
+                <a:solidFill>
+                  <a:srgbClr val="222222"/>
+                </a:solidFill>
+                <a:latin typeface="맑은 고딕"/>
+              </a:rPr>
+              <a:t> → ORA-16000</a:t>
             </a:r>
           </a:p>
           <a:p>
@@ -6396,7 +6537,25 @@
                 </a:solidFill>
                 <a:latin typeface="맑은 고딕"/>
               </a:rPr>
-              <a:t>•  **정렬** — 7만 행 정렬 성공, TEMP 3MB씩 사용</a:t>
+              <a:t>•  </a:t>
+            </a:r>
+            <a:r>
+              <a:rPr sz="1700" b="1">
+                <a:solidFill>
+                  <a:srgbClr val="222222"/>
+                </a:solidFill>
+                <a:latin typeface="맑은 고딕"/>
+              </a:rPr>
+              <a:t>정렬</a:t>
+            </a:r>
+            <a:r>
+              <a:rPr sz="1700" b="0">
+                <a:solidFill>
+                  <a:srgbClr val="222222"/>
+                </a:solidFill>
+                <a:latin typeface="맑은 고딕"/>
+              </a:rPr>
+              <a:t> — 7만 행 정렬 성공, TEMP 3MB씩 사용</a:t>
             </a:r>
           </a:p>
           <a:p>
@@ -6412,7 +6571,45 @@
                 </a:solidFill>
                 <a:latin typeface="맑은 고딕"/>
               </a:rPr>
-              <a:t>•  **`EXPLAIN PLAN`** — `PLAN_TABLE` 이 GTT 다</a:t>
+              <a:t>•  </a:t>
+            </a:r>
+            <a:r>
+              <a:rPr sz="1700" b="1">
+                <a:solidFill>
+                  <a:srgbClr val="222222"/>
+                </a:solidFill>
+                <a:latin typeface="Consolas"/>
+                <a:cs typeface="Consolas"/>
+              </a:rPr>
+              <a:t>EXPLAIN PLAN</a:t>
+            </a:r>
+            <a:r>
+              <a:rPr sz="1700" b="0">
+                <a:solidFill>
+                  <a:srgbClr val="222222"/>
+                </a:solidFill>
+                <a:latin typeface="맑은 고딕"/>
+              </a:rPr>
+              <a:t> — </a:t>
+            </a:r>
+            <a:r>
+              <a:rPr sz="1700" b="0">
+                <a:solidFill>
+                  <a:srgbClr val="222222"/>
+                </a:solidFill>
+                <a:latin typeface="Consolas"/>
+                <a:cs typeface="Consolas"/>
+              </a:rPr>
+              <a:t>PLAN_TABLE</a:t>
+            </a:r>
+            <a:r>
+              <a:rPr sz="1700" b="0">
+                <a:solidFill>
+                  <a:srgbClr val="222222"/>
+                </a:solidFill>
+                <a:latin typeface="맑은 고딕"/>
+              </a:rPr>
+              <a:t> 이 GTT 다</a:t>
             </a:r>
           </a:p>
           <a:p>
@@ -6428,7 +6625,54 @@
                 </a:solidFill>
                 <a:latin typeface="맑은 고딕"/>
               </a:rPr>
-              <a:t>•  **GTT `INSERT`** — `TEMP_UNDO_ENABLED=FALSE` 인데도 동작</a:t>
+              <a:t>•  </a:t>
+            </a:r>
+            <a:r>
+              <a:rPr sz="1700" b="1">
+                <a:solidFill>
+                  <a:srgbClr val="222222"/>
+                </a:solidFill>
+                <a:latin typeface="맑은 고딕"/>
+              </a:rPr>
+              <a:t>GTT </a:t>
+            </a:r>
+            <a:r>
+              <a:rPr sz="1700" b="1">
+                <a:solidFill>
+                  <a:srgbClr val="222222"/>
+                </a:solidFill>
+                <a:latin typeface="Consolas"/>
+                <a:cs typeface="Consolas"/>
+              </a:rPr>
+              <a:t>INSERT</a:t>
+            </a:r>
+            <a:r>
+              <a:rPr sz="1700" b="0">
+                <a:solidFill>
+                  <a:srgbClr val="222222"/>
+                </a:solidFill>
+                <a:latin typeface="맑은 고딕"/>
+              </a:rPr>
+              <a:t> — </a:t>
+            </a:r>
+            <a:r>
+              <a:rPr sz="1700" b="0">
+                <a:solidFill>
+                  <a:srgbClr val="222222"/>
+                </a:solidFill>
+                <a:latin typeface="Consolas"/>
+                <a:cs typeface="Consolas"/>
+              </a:rPr>
+              <a:t>TEMP_UNDO_ENABLED=FALSE</a:t>
+            </a:r>
+            <a:r>
+              <a:rPr sz="1700" b="0">
+                <a:solidFill>
+                  <a:srgbClr val="222222"/>
+                </a:solidFill>
+                <a:latin typeface="맑은 고딕"/>
+              </a:rPr>
+              <a:t> 인데도 동작</a:t>
             </a:r>
           </a:p>
           <a:p>
@@ -6444,7 +6688,35 @@
                 </a:solidFill>
                 <a:latin typeface="맑은 고딕"/>
               </a:rPr>
-              <a:t>•  **시퀀스 `NEXTVAL`** — 되지만 값이 뛴다</a:t>
+              <a:t>•  </a:t>
+            </a:r>
+            <a:r>
+              <a:rPr sz="1700" b="1">
+                <a:solidFill>
+                  <a:srgbClr val="222222"/>
+                </a:solidFill>
+                <a:latin typeface="맑은 고딕"/>
+              </a:rPr>
+              <a:t>시퀀스 </a:t>
+            </a:r>
+            <a:r>
+              <a:rPr sz="1700" b="1">
+                <a:solidFill>
+                  <a:srgbClr val="222222"/>
+                </a:solidFill>
+                <a:latin typeface="Consolas"/>
+                <a:cs typeface="Consolas"/>
+              </a:rPr>
+              <a:t>NEXTVAL</a:t>
+            </a:r>
+            <a:r>
+              <a:rPr sz="1700" b="0">
+                <a:solidFill>
+                  <a:srgbClr val="222222"/>
+                </a:solidFill>
+                <a:latin typeface="맑은 고딕"/>
+              </a:rPr>
+              <a:t> — 되지만 값이 뛴다</a:t>
             </a:r>
           </a:p>
         </p:txBody>
@@ -6623,7 +6895,35 @@
                 </a:solidFill>
                 <a:latin typeface="맑은 고딕"/>
               </a:rPr>
-              <a:t>•  Primary 에서 `NEXTVAL` → **1**</a:t>
+              <a:t>•  Primary 에서 </a:t>
+            </a:r>
+            <a:r>
+              <a:rPr sz="1700" b="0">
+                <a:solidFill>
+                  <a:srgbClr val="222222"/>
+                </a:solidFill>
+                <a:latin typeface="Consolas"/>
+                <a:cs typeface="Consolas"/>
+              </a:rPr>
+              <a:t>NEXTVAL</a:t>
+            </a:r>
+            <a:r>
+              <a:rPr sz="1700" b="0">
+                <a:solidFill>
+                  <a:srgbClr val="222222"/>
+                </a:solidFill>
+                <a:latin typeface="맑은 고딕"/>
+              </a:rPr>
+              <a:t> → </a:t>
+            </a:r>
+            <a:r>
+              <a:rPr sz="1700" b="1">
+                <a:solidFill>
+                  <a:srgbClr val="222222"/>
+                </a:solidFill>
+                <a:latin typeface="맑은 고딕"/>
+              </a:rPr>
+              <a:t>1</a:t>
             </a:r>
           </a:p>
           <a:p>
@@ -6639,7 +6939,16 @@
                 </a:solidFill>
                 <a:latin typeface="맑은 고딕"/>
               </a:rPr>
-              <a:t>•  같은 시퀀스를 Standby 에서 → **21**</a:t>
+              <a:t>•  같은 시퀀스를 Standby 에서 → </a:t>
+            </a:r>
+            <a:r>
+              <a:rPr sz="1700" b="1">
+                <a:solidFill>
+                  <a:srgbClr val="222222"/>
+                </a:solidFill>
+                <a:latin typeface="맑은 고딕"/>
+              </a:rPr>
+              <a:t>21</a:t>
             </a:r>
           </a:p>
           <a:p>
@@ -6671,7 +6980,16 @@
                 </a:solidFill>
                 <a:latin typeface="맑은 고딕"/>
               </a:rPr>
-              <a:t>•  **연속성이 요건이면 Standby 에서 쓰지 않는다**</a:t>
+              <a:t>•  </a:t>
+            </a:r>
+            <a:r>
+              <a:rPr sz="1700" b="1">
+                <a:solidFill>
+                  <a:srgbClr val="222222"/>
+                </a:solidFill>
+                <a:latin typeface="맑은 고딕"/>
+              </a:rPr>
+              <a:t>연속성이 요건이면 Standby 에서 쓰지 않는다</a:t>
             </a:r>
           </a:p>
         </p:txBody>
@@ -6850,7 +7168,35 @@
                 </a:solidFill>
                 <a:latin typeface="맑은 고딕"/>
               </a:rPr>
-              <a:t>•  `DBMS_STATS` → 열 줄 넘는 스택, 안쪽에 **ORA-16000**</a:t>
+              <a:t>•  </a:t>
+            </a:r>
+            <a:r>
+              <a:rPr sz="1700" b="0">
+                <a:solidFill>
+                  <a:srgbClr val="222222"/>
+                </a:solidFill>
+                <a:latin typeface="Consolas"/>
+                <a:cs typeface="Consolas"/>
+              </a:rPr>
+              <a:t>DBMS_STATS</a:t>
+            </a:r>
+            <a:r>
+              <a:rPr sz="1700" b="0">
+                <a:solidFill>
+                  <a:srgbClr val="222222"/>
+                </a:solidFill>
+                <a:latin typeface="맑은 고딕"/>
+              </a:rPr>
+              <a:t> → 열 줄 넘는 스택, 안쪽에 </a:t>
+            </a:r>
+            <a:r>
+              <a:rPr sz="1700" b="1">
+                <a:solidFill>
+                  <a:srgbClr val="222222"/>
+                </a:solidFill>
+                <a:latin typeface="맑은 고딕"/>
+              </a:rPr>
+              <a:t>ORA-16000</a:t>
             </a:r>
           </a:p>
           <a:p>
@@ -6866,7 +7212,25 @@
                 </a:solidFill>
                 <a:latin typeface="맑은 고딕"/>
               </a:rPr>
-              <a:t>•  AWR 스냅샷 → 전용 오류 **ORA-13516**, 스택이 짧다</a:t>
+              <a:t>•  AWR 스냅샷 → 전용 오류 </a:t>
+            </a:r>
+            <a:r>
+              <a:rPr sz="1700" b="1">
+                <a:solidFill>
+                  <a:srgbClr val="222222"/>
+                </a:solidFill>
+                <a:latin typeface="맑은 고딕"/>
+              </a:rPr>
+              <a:t>ORA-13516</a:t>
+            </a:r>
+            <a:r>
+              <a:rPr sz="1700" b="0">
+                <a:solidFill>
+                  <a:srgbClr val="222222"/>
+                </a:solidFill>
+                <a:latin typeface="맑은 고딕"/>
+              </a:rPr>
+              <a:t>, 스택이 짧다</a:t>
             </a:r>
           </a:p>
           <a:p>
@@ -6882,7 +7246,26 @@
                 </a:solidFill>
                 <a:latin typeface="맑은 고딕"/>
               </a:rPr>
-              <a:t>•  `V$` 뷰 조회 → 문제없다</a:t>
+              <a:t>•  </a:t>
+            </a:r>
+            <a:r>
+              <a:rPr sz="1700" b="0">
+                <a:solidFill>
+                  <a:srgbClr val="222222"/>
+                </a:solidFill>
+                <a:latin typeface="Consolas"/>
+                <a:cs typeface="Consolas"/>
+              </a:rPr>
+              <a:t>V$</a:t>
+            </a:r>
+            <a:r>
+              <a:rPr sz="1700" b="0">
+                <a:solidFill>
+                  <a:srgbClr val="222222"/>
+                </a:solidFill>
+                <a:latin typeface="맑은 고딕"/>
+              </a:rPr>
+              <a:t> 뷰 조회 → 문제없다</a:t>
             </a:r>
           </a:p>
           <a:p>
@@ -6898,7 +7281,16 @@
                 </a:solidFill>
                 <a:latin typeface="맑은 고딕"/>
               </a:rPr>
-              <a:t>•  **"보는 것은 되고 남기는 것은 안 된다"**</a:t>
+              <a:t>•  </a:t>
+            </a:r>
+            <a:r>
+              <a:rPr sz="1700" b="1">
+                <a:solidFill>
+                  <a:srgbClr val="222222"/>
+                </a:solidFill>
+                <a:latin typeface="맑은 고딕"/>
+              </a:rPr>
+              <a:t>"보는 것은 되고 남기는 것은 안 된다"</a:t>
             </a:r>
           </a:p>
         </p:txBody>
@@ -7077,7 +7469,16 @@
                 </a:solidFill>
                 <a:latin typeface="맑은 고딕"/>
               </a:rPr>
-              <a:t>•  **영구 데이터 파일이나 딕셔너리를 바꾸는가**</a:t>
+              <a:t>•  </a:t>
+            </a:r>
+            <a:r>
+              <a:rPr sz="1700" b="1">
+                <a:solidFill>
+                  <a:srgbClr val="222222"/>
+                </a:solidFill>
+                <a:latin typeface="맑은 고딕"/>
+              </a:rPr>
+              <a:t>영구 데이터 파일이나 딕셔너리를 바꾸는가</a:t>
             </a:r>
           </a:p>
           <a:p>
@@ -7559,7 +7960,17 @@
                 </a:solidFill>
                 <a:latin typeface="맑은 고딕"/>
               </a:rPr>
-              <a:t>•  `ALTER SESSION ENABLE ADG_REDIRECT_DML`</a:t>
+              <a:t>•  </a:t>
+            </a:r>
+            <a:r>
+              <a:rPr sz="1700" b="0">
+                <a:solidFill>
+                  <a:srgbClr val="222222"/>
+                </a:solidFill>
+                <a:latin typeface="Consolas"/>
+                <a:cs typeface="Consolas"/>
+              </a:rPr>
+              <a:t>ALTER SESSION ENABLE ADG_REDIRECT_DML</a:t>
             </a:r>
           </a:p>
           <a:p>
@@ -7575,7 +7986,35 @@
                 </a:solidFill>
                 <a:latin typeface="맑은 고딕"/>
               </a:rPr>
-              <a:t>•  일반 사용자로 `INSERT` → **1 row created**</a:t>
+              <a:t>•  일반 사용자로 </a:t>
+            </a:r>
+            <a:r>
+              <a:rPr sz="1700" b="0">
+                <a:solidFill>
+                  <a:srgbClr val="222222"/>
+                </a:solidFill>
+                <a:latin typeface="Consolas"/>
+                <a:cs typeface="Consolas"/>
+              </a:rPr>
+              <a:t>INSERT</a:t>
+            </a:r>
+            <a:r>
+              <a:rPr sz="1700" b="0">
+                <a:solidFill>
+                  <a:srgbClr val="222222"/>
+                </a:solidFill>
+                <a:latin typeface="맑은 고딕"/>
+              </a:rPr>
+              <a:t> → </a:t>
+            </a:r>
+            <a:r>
+              <a:rPr sz="1700" b="1">
+                <a:solidFill>
+                  <a:srgbClr val="222222"/>
+                </a:solidFill>
+                <a:latin typeface="맑은 고딕"/>
+              </a:rPr>
+              <a:t>1 row created</a:t>
             </a:r>
           </a:p>
           <a:p>
@@ -7591,7 +8030,25 @@
                 </a:solidFill>
                 <a:latin typeface="맑은 고딕"/>
               </a:rPr>
-              <a:t>•  같은 행이 **Primary 에서도** 조회된다</a:t>
+              <a:t>•  같은 행이 </a:t>
+            </a:r>
+            <a:r>
+              <a:rPr sz="1700" b="1">
+                <a:solidFill>
+                  <a:srgbClr val="222222"/>
+                </a:solidFill>
+                <a:latin typeface="맑은 고딕"/>
+              </a:rPr>
+              <a:t>Primary 에서도</a:t>
+            </a:r>
+            <a:r>
+              <a:rPr sz="1700" b="0">
+                <a:solidFill>
+                  <a:srgbClr val="222222"/>
+                </a:solidFill>
+                <a:latin typeface="맑은 고딕"/>
+              </a:rPr>
+              <a:t> 조회된다</a:t>
             </a:r>
           </a:p>
           <a:p>
@@ -7607,7 +8064,45 @@
                 </a:solidFill>
                 <a:latin typeface="맑은 고딕"/>
               </a:rPr>
-              <a:t>•  `UPDATE`·`DELETE` 도 마찬가지</a:t>
+              <a:t>•  </a:t>
+            </a:r>
+            <a:r>
+              <a:rPr sz="1700" b="0">
+                <a:solidFill>
+                  <a:srgbClr val="222222"/>
+                </a:solidFill>
+                <a:latin typeface="Consolas"/>
+                <a:cs typeface="Consolas"/>
+              </a:rPr>
+              <a:t>UPDATE</a:t>
+            </a:r>
+            <a:r>
+              <a:rPr sz="1700" b="0">
+                <a:solidFill>
+                  <a:srgbClr val="222222"/>
+                </a:solidFill>
+                <a:latin typeface="맑은 고딕"/>
+              </a:rPr>
+              <a:t>·</a:t>
+            </a:r>
+            <a:r>
+              <a:rPr sz="1700" b="0">
+                <a:solidFill>
+                  <a:srgbClr val="222222"/>
+                </a:solidFill>
+                <a:latin typeface="Consolas"/>
+                <a:cs typeface="Consolas"/>
+              </a:rPr>
+              <a:t>DELETE</a:t>
+            </a:r>
+            <a:r>
+              <a:rPr sz="1700" b="0">
+                <a:solidFill>
+                  <a:srgbClr val="222222"/>
+                </a:solidFill>
+                <a:latin typeface="맑은 고딕"/>
+              </a:rPr>
+              <a:t> 도 마찬가지</a:t>
             </a:r>
           </a:p>
         </p:txBody>
@@ -7786,7 +8281,26 @@
                 </a:solidFill>
                 <a:latin typeface="맑은 고딕"/>
               </a:rPr>
-              <a:t>•  세션 설정은 성공 (`Session altered.`)</a:t>
+              <a:t>•  세션 설정은 성공 (</a:t>
+            </a:r>
+            <a:r>
+              <a:rPr sz="1700" b="0">
+                <a:solidFill>
+                  <a:srgbClr val="222222"/>
+                </a:solidFill>
+                <a:latin typeface="Consolas"/>
+                <a:cs typeface="Consolas"/>
+              </a:rPr>
+              <a:t>Session altered.</a:t>
+            </a:r>
+            <a:r>
+              <a:rPr sz="1700" b="0">
+                <a:solidFill>
+                  <a:srgbClr val="222222"/>
+                </a:solidFill>
+                <a:latin typeface="맑은 고딕"/>
+              </a:rPr>
+              <a:t>)</a:t>
             </a:r>
           </a:p>
           <a:p>
@@ -7802,7 +8316,16 @@
                 </a:solidFill>
                 <a:latin typeface="맑은 고딕"/>
               </a:rPr>
-              <a:t>•  실행에서 **ORA-16397**</a:t>
+              <a:t>•  실행에서 </a:t>
+            </a:r>
+            <a:r>
+              <a:rPr sz="1700" b="1">
+                <a:solidFill>
+                  <a:srgbClr val="222222"/>
+                </a:solidFill>
+                <a:latin typeface="맑은 고딕"/>
+              </a:rPr>
+              <a:t>ORA-16397</a:t>
             </a:r>
           </a:p>
           <a:p>
@@ -7834,7 +8357,16 @@
                 </a:solidFill>
                 <a:latin typeface="맑은 고딕"/>
               </a:rPr>
-              <a:t>•  **관리자 계정으로 시험하면 기능이 없다고 오판한다**</a:t>
+              <a:t>•  </a:t>
+            </a:r>
+            <a:r>
+              <a:rPr sz="1700" b="1">
+                <a:solidFill>
+                  <a:srgbClr val="222222"/>
+                </a:solidFill>
+                <a:latin typeface="맑은 고딕"/>
+              </a:rPr>
+              <a:t>관리자 계정으로 시험하면 기능이 없다고 오판한다</a:t>
             </a:r>
           </a:p>
         </p:txBody>
@@ -8038,7 +8570,26 @@
                 </a:solidFill>
                 <a:latin typeface="맑은 고딕"/>
               </a:rPr>
-              <a:t>•  `STANDBY_MAX_DATA_DELAY` 로 허용 지연을 정하고 ORA-03172 를 해석한다.</a:t>
+              <a:t>•  </a:t>
+            </a:r>
+            <a:r>
+              <a:rPr sz="1600" b="0">
+                <a:solidFill>
+                  <a:srgbClr val="222222"/>
+                </a:solidFill>
+                <a:latin typeface="Consolas"/>
+                <a:cs typeface="Consolas"/>
+              </a:rPr>
+              <a:t>STANDBY_MAX_DATA_DELAY</a:t>
+            </a:r>
+            <a:r>
+              <a:rPr sz="1600" b="0">
+                <a:solidFill>
+                  <a:srgbClr val="222222"/>
+                </a:solidFill>
+                <a:latin typeface="맑은 고딕"/>
+              </a:rPr>
+              <a:t> 로 허용 지연을 정하고 ORA-03172 를 해석한다.</a:t>
             </a:r>
           </a:p>
           <a:p>
@@ -8054,7 +8605,26 @@
                 </a:solidFill>
                 <a:latin typeface="맑은 고딕"/>
               </a:rPr>
-              <a:t>•  `SYNC WITH PRIMARY` 가 실패하는 이유를 보호 모드와 연결해 설명한다.</a:t>
+              <a:t>•  </a:t>
+            </a:r>
+            <a:r>
+              <a:rPr sz="1600" b="0">
+                <a:solidFill>
+                  <a:srgbClr val="222222"/>
+                </a:solidFill>
+                <a:latin typeface="Consolas"/>
+                <a:cs typeface="Consolas"/>
+              </a:rPr>
+              <a:t>SYNC WITH PRIMARY</a:t>
+            </a:r>
+            <a:r>
+              <a:rPr sz="1600" b="0">
+                <a:solidFill>
+                  <a:srgbClr val="222222"/>
+                </a:solidFill>
+                <a:latin typeface="맑은 고딕"/>
+              </a:rPr>
+              <a:t> 가 실패하는 이유를 보호 모드와 연결해 설명한다.</a:t>
             </a:r>
           </a:p>
           <a:p>
@@ -8070,7 +8640,26 @@
                 </a:solidFill>
                 <a:latin typeface="맑은 고딕"/>
               </a:rPr>
-              <a:t>•  `V$STANDBY_EVENT_HISTOGRAM` 으로 지연의 분포를 읽는다.</a:t>
+              <a:t>•  </a:t>
+            </a:r>
+            <a:r>
+              <a:rPr sz="1600" b="0">
+                <a:solidFill>
+                  <a:srgbClr val="222222"/>
+                </a:solidFill>
+                <a:latin typeface="Consolas"/>
+                <a:cs typeface="Consolas"/>
+              </a:rPr>
+              <a:t>V$STANDBY_EVENT_HISTOGRAM</a:t>
+            </a:r>
+            <a:r>
+              <a:rPr sz="1600" b="0">
+                <a:solidFill>
+                  <a:srgbClr val="222222"/>
+                </a:solidFill>
+                <a:latin typeface="맑은 고딕"/>
+              </a:rPr>
+              <a:t> 으로 지연의 분포를 읽는다.</a:t>
             </a:r>
           </a:p>
           <a:p>
@@ -8265,7 +8854,25 @@
                 </a:solidFill>
                 <a:latin typeface="맑은 고딕"/>
               </a:rPr>
-              <a:t>•  리다이렉션 꺼짐 + DML → **ORA-16000** (시도하지 않았다)</a:t>
+              <a:t>•  리다이렉션 꺼짐 + DML → </a:t>
+            </a:r>
+            <a:r>
+              <a:rPr sz="1700" b="1">
+                <a:solidFill>
+                  <a:srgbClr val="222222"/>
+                </a:solidFill>
+                <a:latin typeface="맑은 고딕"/>
+              </a:rPr>
+              <a:t>ORA-16000</a:t>
+            </a:r>
+            <a:r>
+              <a:rPr sz="1700" b="0">
+                <a:solidFill>
+                  <a:srgbClr val="222222"/>
+                </a:solidFill>
+                <a:latin typeface="맑은 고딕"/>
+              </a:rPr>
+              <a:t> (시도하지 않았다)</a:t>
             </a:r>
           </a:p>
           <a:p>
@@ -8281,7 +8888,25 @@
                 </a:solidFill>
                 <a:latin typeface="맑은 고딕"/>
               </a:rPr>
-              <a:t>•  리다이렉션 켜짐 + DDL → **ORA-16000** (대상이 아니다)</a:t>
+              <a:t>•  리다이렉션 켜짐 + DDL → </a:t>
+            </a:r>
+            <a:r>
+              <a:rPr sz="1700" b="1">
+                <a:solidFill>
+                  <a:srgbClr val="222222"/>
+                </a:solidFill>
+                <a:latin typeface="맑은 고딕"/>
+              </a:rPr>
+              <a:t>ORA-16000</a:t>
+            </a:r>
+            <a:r>
+              <a:rPr sz="1700" b="0">
+                <a:solidFill>
+                  <a:srgbClr val="222222"/>
+                </a:solidFill>
+                <a:latin typeface="맑은 고딕"/>
+              </a:rPr>
+              <a:t> (대상이 아니다)</a:t>
             </a:r>
           </a:p>
           <a:p>
@@ -8297,7 +8922,25 @@
                 </a:solidFill>
                 <a:latin typeface="맑은 고딕"/>
               </a:rPr>
-              <a:t>•  리다이렉션 켜짐 + DML + SYS → **ORA-16397** (시도했다가 실패)</a:t>
+              <a:t>•  리다이렉션 켜짐 + DML + SYS → </a:t>
+            </a:r>
+            <a:r>
+              <a:rPr sz="1700" b="1">
+                <a:solidFill>
+                  <a:srgbClr val="222222"/>
+                </a:solidFill>
+                <a:latin typeface="맑은 고딕"/>
+              </a:rPr>
+              <a:t>ORA-16397</a:t>
+            </a:r>
+            <a:r>
+              <a:rPr sz="1700" b="0">
+                <a:solidFill>
+                  <a:srgbClr val="222222"/>
+                </a:solidFill>
+                <a:latin typeface="맑은 고딕"/>
+              </a:rPr>
+              <a:t> (시도했다가 실패)</a:t>
             </a:r>
           </a:p>
           <a:p>
@@ -8492,7 +9135,16 @@
                 </a:solidFill>
                 <a:latin typeface="맑은 고딕"/>
               </a:rPr>
-              <a:t>•  문장 하나가 **두 번의 네트워크 왕복**</a:t>
+              <a:t>•  문장 하나가 </a:t>
+            </a:r>
+            <a:r>
+              <a:rPr sz="1700" b="1">
+                <a:solidFill>
+                  <a:srgbClr val="222222"/>
+                </a:solidFill>
+                <a:latin typeface="맑은 고딕"/>
+              </a:rPr>
+              <a:t>두 번의 네트워크 왕복</a:t>
             </a:r>
           </a:p>
           <a:p>
@@ -8508,7 +9160,25 @@
                 </a:solidFill>
                 <a:latin typeface="맑은 고딕"/>
               </a:rPr>
-              <a:t>•  실행은 결국 **Primary** 에서 일어난다 — Primary 부담은 줄지 않는다</a:t>
+              <a:t>•  실행은 결국 </a:t>
+            </a:r>
+            <a:r>
+              <a:rPr sz="1700" b="1">
+                <a:solidFill>
+                  <a:srgbClr val="222222"/>
+                </a:solidFill>
+                <a:latin typeface="맑은 고딕"/>
+              </a:rPr>
+              <a:t>Primary</a:t>
+            </a:r>
+            <a:r>
+              <a:rPr sz="1700" b="0">
+                <a:solidFill>
+                  <a:srgbClr val="222222"/>
+                </a:solidFill>
+                <a:latin typeface="맑은 고딕"/>
+              </a:rPr>
+              <a:t> 에서 일어난다 — Primary 부담은 줄지 않는다</a:t>
             </a:r>
           </a:p>
           <a:p>
@@ -8974,7 +9644,26 @@
                 </a:solidFill>
                 <a:latin typeface="맑은 고딕"/>
               </a:rPr>
-              <a:t>•  `ALTER SESSION SET standby_max_data_delay=1` (초 단위)</a:t>
+              <a:t>•  </a:t>
+            </a:r>
+            <a:r>
+              <a:rPr sz="1700" b="0">
+                <a:solidFill>
+                  <a:srgbClr val="222222"/>
+                </a:solidFill>
+                <a:latin typeface="Consolas"/>
+                <a:cs typeface="Consolas"/>
+              </a:rPr>
+              <a:t>ALTER SESSION SET standby_max_data_delay=1</a:t>
+            </a:r>
+            <a:r>
+              <a:rPr sz="1700" b="0">
+                <a:solidFill>
+                  <a:srgbClr val="222222"/>
+                </a:solidFill>
+                <a:latin typeface="맑은 고딕"/>
+              </a:rPr>
+              <a:t> (초 단위)</a:t>
             </a:r>
           </a:p>
           <a:p>
@@ -9006,7 +9695,44 @@
                 </a:solidFill>
                 <a:latin typeface="맑은 고딕"/>
               </a:rPr>
-              <a:t>•  `=0` → **ORA-03172 of 0 seconds exceeded** (ASYNC 라 항상)</a:t>
+              <a:t>•  </a:t>
+            </a:r>
+            <a:r>
+              <a:rPr sz="1700" b="0">
+                <a:solidFill>
+                  <a:srgbClr val="222222"/>
+                </a:solidFill>
+                <a:latin typeface="Consolas"/>
+                <a:cs typeface="Consolas"/>
+              </a:rPr>
+              <a:t>=0</a:t>
+            </a:r>
+            <a:r>
+              <a:rPr sz="1700" b="0">
+                <a:solidFill>
+                  <a:srgbClr val="222222"/>
+                </a:solidFill>
+                <a:latin typeface="맑은 고딕"/>
+              </a:rPr>
+              <a:t> → </a:t>
+            </a:r>
+            <a:r>
+              <a:rPr sz="1700" b="1">
+                <a:solidFill>
+                  <a:srgbClr val="222222"/>
+                </a:solidFill>
+                <a:latin typeface="맑은 고딕"/>
+              </a:rPr>
+              <a:t>ORA-03172 of 0 seconds exceeded</a:t>
+            </a:r>
+            <a:r>
+              <a:rPr sz="1700" b="0">
+                <a:solidFill>
+                  <a:srgbClr val="222222"/>
+                </a:solidFill>
+                <a:latin typeface="맑은 고딕"/>
+              </a:rPr>
+              <a:t> (ASYNC 라 항상)</a:t>
             </a:r>
           </a:p>
           <a:p>
@@ -9022,7 +9748,35 @@
                 </a:solidFill>
                 <a:latin typeface="맑은 고딕"/>
               </a:rPr>
-              <a:t>•  적용 정지 후 lag 1분 22초 → `=1` 로 **ORA-03172**</a:t>
+              <a:t>•  적용 정지 후 lag 1분 22초 → </a:t>
+            </a:r>
+            <a:r>
+              <a:rPr sz="1700" b="0">
+                <a:solidFill>
+                  <a:srgbClr val="222222"/>
+                </a:solidFill>
+                <a:latin typeface="Consolas"/>
+                <a:cs typeface="Consolas"/>
+              </a:rPr>
+              <a:t>=1</a:t>
+            </a:r>
+            <a:r>
+              <a:rPr sz="1700" b="0">
+                <a:solidFill>
+                  <a:srgbClr val="222222"/>
+                </a:solidFill>
+                <a:latin typeface="맑은 고딕"/>
+              </a:rPr>
+              <a:t> 로 </a:t>
+            </a:r>
+            <a:r>
+              <a:rPr sz="1700" b="1">
+                <a:solidFill>
+                  <a:srgbClr val="222222"/>
+                </a:solidFill>
+                <a:latin typeface="맑은 고딕"/>
+              </a:rPr>
+              <a:t>ORA-03172</a:t>
             </a:r>
           </a:p>
         </p:txBody>
@@ -9201,7 +9955,25 @@
                 </a:solidFill>
                 <a:latin typeface="맑은 고딕"/>
               </a:rPr>
-              <a:t>•  한도 없음 → 성공하되 **옛 데이터**를 돌려준다</a:t>
+              <a:t>•  한도 없음 → 성공하되 </a:t>
+            </a:r>
+            <a:r>
+              <a:rPr sz="1700" b="1">
+                <a:solidFill>
+                  <a:srgbClr val="222222"/>
+                </a:solidFill>
+                <a:latin typeface="맑은 고딕"/>
+              </a:rPr>
+              <a:t>옛 데이터</a:t>
+            </a:r>
+            <a:r>
+              <a:rPr sz="1700" b="0">
+                <a:solidFill>
+                  <a:srgbClr val="222222"/>
+                </a:solidFill>
+                <a:latin typeface="맑은 고딕"/>
+              </a:rPr>
+              <a:t>를 돌려준다</a:t>
             </a:r>
           </a:p>
           <a:p>
@@ -9217,7 +9989,25 @@
                 </a:solidFill>
                 <a:latin typeface="맑은 고딕"/>
               </a:rPr>
-              <a:t>•  한도 있음 → **거부**한다 (ORA-03172)</a:t>
+              <a:t>•  한도 있음 → </a:t>
+            </a:r>
+            <a:r>
+              <a:rPr sz="1700" b="1">
+                <a:solidFill>
+                  <a:srgbClr val="222222"/>
+                </a:solidFill>
+                <a:latin typeface="맑은 고딕"/>
+              </a:rPr>
+              <a:t>거부</a:t>
+            </a:r>
+            <a:r>
+              <a:rPr sz="1700" b="0">
+                <a:solidFill>
+                  <a:srgbClr val="222222"/>
+                </a:solidFill>
+                <a:latin typeface="맑은 고딕"/>
+              </a:rPr>
+              <a:t>한다 (ORA-03172)</a:t>
             </a:r>
           </a:p>
           <a:p>
@@ -9233,7 +10023,25 @@
                 </a:solidFill>
                 <a:latin typeface="맑은 고딕"/>
               </a:rPr>
-              <a:t>•  판단을 **애플리케이션이 하게** 해 준다</a:t>
+              <a:t>•  판단을 </a:t>
+            </a:r>
+            <a:r>
+              <a:rPr sz="1700" b="1">
+                <a:solidFill>
+                  <a:srgbClr val="222222"/>
+                </a:solidFill>
+                <a:latin typeface="맑은 고딕"/>
+              </a:rPr>
+              <a:t>애플리케이션이 하게</a:t>
+            </a:r>
+            <a:r>
+              <a:rPr sz="1700" b="0">
+                <a:solidFill>
+                  <a:srgbClr val="222222"/>
+                </a:solidFill>
+                <a:latin typeface="맑은 고딕"/>
+              </a:rPr>
+              <a:t> 해 준다</a:t>
             </a:r>
           </a:p>
           <a:p>
@@ -9249,7 +10057,17 @@
                 </a:solidFill>
                 <a:latin typeface="맑은 고딕"/>
               </a:rPr>
-              <a:t>•  `try { standby } catch (ORA-03172) { primary }`</a:t>
+              <a:t>•  </a:t>
+            </a:r>
+            <a:r>
+              <a:rPr sz="1700" b="0">
+                <a:solidFill>
+                  <a:srgbClr val="222222"/>
+                </a:solidFill>
+                <a:latin typeface="Consolas"/>
+                <a:cs typeface="Consolas"/>
+              </a:rPr>
+              <a:t>try { standby } catch (ORA-03172) { primary }</a:t>
             </a:r>
           </a:p>
         </p:txBody>
@@ -9428,7 +10246,35 @@
                 </a:solidFill>
                 <a:latin typeface="맑은 고딕"/>
               </a:rPr>
-              <a:t>•  `SYS` 로 설정 → **ORA-03174: does not apply to SYS users**</a:t>
+              <a:t>•  </a:t>
+            </a:r>
+            <a:r>
+              <a:rPr sz="1700" b="0">
+                <a:solidFill>
+                  <a:srgbClr val="222222"/>
+                </a:solidFill>
+                <a:latin typeface="Consolas"/>
+                <a:cs typeface="Consolas"/>
+              </a:rPr>
+              <a:t>SYS</a:t>
+            </a:r>
+            <a:r>
+              <a:rPr sz="1700" b="0">
+                <a:solidFill>
+                  <a:srgbClr val="222222"/>
+                </a:solidFill>
+                <a:latin typeface="맑은 고딕"/>
+              </a:rPr>
+              <a:t> 로 설정 → </a:t>
+            </a:r>
+            <a:r>
+              <a:rPr sz="1700" b="1">
+                <a:solidFill>
+                  <a:srgbClr val="222222"/>
+                </a:solidFill>
+                <a:latin typeface="맑은 고딕"/>
+              </a:rPr>
+              <a:t>ORA-03174: does not apply to SYS users</a:t>
             </a:r>
           </a:p>
           <a:p>
@@ -9444,7 +10290,25 @@
                 </a:solidFill>
                 <a:latin typeface="맑은 고딕"/>
               </a:rPr>
-              <a:t>•  오류가 나도 **그 뒤의 조회는 정상 수행**된다</a:t>
+              <a:t>•  오류가 나도 </a:t>
+            </a:r>
+            <a:r>
+              <a:rPr sz="1700" b="1">
+                <a:solidFill>
+                  <a:srgbClr val="222222"/>
+                </a:solidFill>
+                <a:latin typeface="맑은 고딕"/>
+              </a:rPr>
+              <a:t>그 뒤의 조회는 정상 수행</a:t>
+            </a:r>
+            <a:r>
+              <a:rPr sz="1700" b="0">
+                <a:solidFill>
+                  <a:srgbClr val="222222"/>
+                </a:solidFill>
+                <a:latin typeface="맑은 고딕"/>
+              </a:rPr>
+              <a:t>된다</a:t>
             </a:r>
           </a:p>
           <a:p>
@@ -9476,7 +10340,16 @@
                 </a:solidFill>
                 <a:latin typeface="맑은 고딕"/>
               </a:rPr>
-              <a:t>•  리다이렉션의 ORA-16397 과 **같은 교훈**</a:t>
+              <a:t>•  리다이렉션의 ORA-16397 과 </a:t>
+            </a:r>
+            <a:r>
+              <a:rPr sz="1700" b="1">
+                <a:solidFill>
+                  <a:srgbClr val="222222"/>
+                </a:solidFill>
+                <a:latin typeface="맑은 고딕"/>
+              </a:rPr>
+              <a:t>같은 교훈</a:t>
             </a:r>
           </a:p>
         </p:txBody>
@@ -9655,7 +10528,35 @@
                 </a:solidFill>
                 <a:latin typeface="맑은 고딕"/>
               </a:rPr>
-              <a:t>•  `ALTER SESSION SYNC WITH PRIMARY` → **ORA-03173**</a:t>
+              <a:t>•  </a:t>
+            </a:r>
+            <a:r>
+              <a:rPr sz="1700" b="0">
+                <a:solidFill>
+                  <a:srgbClr val="222222"/>
+                </a:solidFill>
+                <a:latin typeface="Consolas"/>
+                <a:cs typeface="Consolas"/>
+              </a:rPr>
+              <a:t>ALTER SESSION SYNC WITH PRIMARY</a:t>
+            </a:r>
+            <a:r>
+              <a:rPr sz="1700" b="0">
+                <a:solidFill>
+                  <a:srgbClr val="222222"/>
+                </a:solidFill>
+                <a:latin typeface="맑은 고딕"/>
+              </a:rPr>
+              <a:t> → </a:t>
+            </a:r>
+            <a:r>
+              <a:rPr sz="1700" b="1">
+                <a:solidFill>
+                  <a:srgbClr val="222222"/>
+                </a:solidFill>
+                <a:latin typeface="맑은 고딕"/>
+              </a:rPr>
+              <a:t>ORA-03173</a:t>
             </a:r>
           </a:p>
           <a:p>
@@ -9687,7 +10588,25 @@
                 </a:solidFill>
                 <a:latin typeface="맑은 고딕"/>
               </a:rPr>
-              <a:t>•  8장 : 보호 모드가 **복구 가능성**을 결정했다</a:t>
+              <a:t>•  8장 : 보호 모드가 </a:t>
+            </a:r>
+            <a:r>
+              <a:rPr sz="1700" b="1">
+                <a:solidFill>
+                  <a:srgbClr val="222222"/>
+                </a:solidFill>
+                <a:latin typeface="맑은 고딕"/>
+              </a:rPr>
+              <a:t>복구 가능성</a:t>
+            </a:r>
+            <a:r>
+              <a:rPr sz="1700" b="0">
+                <a:solidFill>
+                  <a:srgbClr val="222222"/>
+                </a:solidFill>
+                <a:latin typeface="맑은 고딕"/>
+              </a:rPr>
+              <a:t>을 결정했다</a:t>
             </a:r>
           </a:p>
           <a:p>
@@ -9703,7 +10622,25 @@
                 </a:solidFill>
                 <a:latin typeface="맑은 고딕"/>
               </a:rPr>
-              <a:t>•  9장 : 보호 모드가 **조회 신선도 보장**을 결정한다</a:t>
+              <a:t>•  9장 : 보호 모드가 </a:t>
+            </a:r>
+            <a:r>
+              <a:rPr sz="1700" b="1">
+                <a:solidFill>
+                  <a:srgbClr val="222222"/>
+                </a:solidFill>
+                <a:latin typeface="맑은 고딕"/>
+              </a:rPr>
+              <a:t>조회 신선도 보장</a:t>
+            </a:r>
+            <a:r>
+              <a:rPr sz="1700" b="0">
+                <a:solidFill>
+                  <a:srgbClr val="222222"/>
+                </a:solidFill>
+                <a:latin typeface="맑은 고딕"/>
+              </a:rPr>
+              <a:t>을 결정한다</a:t>
             </a:r>
           </a:p>
         </p:txBody>
@@ -10121,7 +11058,64 @@
                 </a:solidFill>
                 <a:latin typeface="맑은 고딕"/>
               </a:rPr>
-              <a:t>•  `TIME` + `UNIT` 이 구간, `COUNT` 가 표본 수</a:t>
+              <a:t>•  </a:t>
+            </a:r>
+            <a:r>
+              <a:rPr sz="1700" b="0">
+                <a:solidFill>
+                  <a:srgbClr val="222222"/>
+                </a:solidFill>
+                <a:latin typeface="Consolas"/>
+                <a:cs typeface="Consolas"/>
+              </a:rPr>
+              <a:t>TIME</a:t>
+            </a:r>
+            <a:r>
+              <a:rPr sz="1700" b="0">
+                <a:solidFill>
+                  <a:srgbClr val="222222"/>
+                </a:solidFill>
+                <a:latin typeface="맑은 고딕"/>
+              </a:rPr>
+              <a:t> + </a:t>
+            </a:r>
+            <a:r>
+              <a:rPr sz="1700" b="0">
+                <a:solidFill>
+                  <a:srgbClr val="222222"/>
+                </a:solidFill>
+                <a:latin typeface="Consolas"/>
+                <a:cs typeface="Consolas"/>
+              </a:rPr>
+              <a:t>UNIT</a:t>
+            </a:r>
+            <a:r>
+              <a:rPr sz="1700" b="0">
+                <a:solidFill>
+                  <a:srgbClr val="222222"/>
+                </a:solidFill>
+                <a:latin typeface="맑은 고딕"/>
+              </a:rPr>
+              <a:t> 이 구간, </a:t>
+            </a:r>
+            <a:r>
+              <a:rPr sz="1700" b="0">
+                <a:solidFill>
+                  <a:srgbClr val="222222"/>
+                </a:solidFill>
+                <a:latin typeface="Consolas"/>
+                <a:cs typeface="Consolas"/>
+              </a:rPr>
+              <a:t>COUNT</a:t>
+            </a:r>
+            <a:r>
+              <a:rPr sz="1700" b="0">
+                <a:solidFill>
+                  <a:srgbClr val="222222"/>
+                </a:solidFill>
+                <a:latin typeface="맑은 고딕"/>
+              </a:rPr>
+              <a:t> 가 표본 수</a:t>
             </a:r>
           </a:p>
           <a:p>
@@ -10137,7 +11131,26 @@
                 </a:solidFill>
                 <a:latin typeface="맑은 고딕"/>
               </a:rPr>
-              <a:t>•  실측 : 0초 854회, 2초 1회, **`2 minutes` 59회**</a:t>
+              <a:t>•  실측 : 0초 854회, 2초 1회, </a:t>
+            </a:r>
+            <a:r>
+              <a:rPr sz="1700" b="1">
+                <a:solidFill>
+                  <a:srgbClr val="222222"/>
+                </a:solidFill>
+                <a:latin typeface="Consolas"/>
+                <a:cs typeface="Consolas"/>
+              </a:rPr>
+              <a:t>2 minutes</a:t>
+            </a:r>
+            <a:r>
+              <a:rPr sz="1700" b="1">
+                <a:solidFill>
+                  <a:srgbClr val="222222"/>
+                </a:solidFill>
+                <a:latin typeface="맑은 고딕"/>
+              </a:rPr>
+              <a:t> 59회</a:t>
             </a:r>
           </a:p>
           <a:p>
@@ -10348,7 +11361,17 @@
                 </a:solidFill>
                 <a:latin typeface="맑은 고딕"/>
               </a:rPr>
-              <a:t>•  `ROUND(100*SUM(CASE WHEN time&gt;0 THEN count END)/SUM(count),2)`</a:t>
+              <a:t>•  </a:t>
+            </a:r>
+            <a:r>
+              <a:rPr sz="1700" b="0">
+                <a:solidFill>
+                  <a:srgbClr val="222222"/>
+                </a:solidFill>
+                <a:latin typeface="Consolas"/>
+                <a:cs typeface="Consolas"/>
+              </a:rPr>
+              <a:t>ROUND(100*SUM(CASE WHEN time&gt;0 THEN count END)/SUM(count),2)</a:t>
             </a:r>
           </a:p>
           <a:p>
@@ -10380,7 +11403,25 @@
                 </a:solidFill>
                 <a:latin typeface="맑은 고딕"/>
               </a:rPr>
-              <a:t>•  **누적값이므로 두 시점의 차이**를 본다</a:t>
+              <a:t>•  </a:t>
+            </a:r>
+            <a:r>
+              <a:rPr sz="1700" b="1">
+                <a:solidFill>
+                  <a:srgbClr val="222222"/>
+                </a:solidFill>
+                <a:latin typeface="맑은 고딕"/>
+              </a:rPr>
+              <a:t>누적값이므로 두 시점의 차이</a:t>
+            </a:r>
+            <a:r>
+              <a:rPr sz="1700" b="0">
+                <a:solidFill>
+                  <a:srgbClr val="222222"/>
+                </a:solidFill>
+                <a:latin typeface="맑은 고딕"/>
+              </a:rPr>
+              <a:t>를 본다</a:t>
             </a:r>
           </a:p>
           <a:p>
@@ -10811,7 +11852,26 @@
                 </a:solidFill>
                 <a:latin typeface="맑은 고딕"/>
               </a:rPr>
-              <a:t>•  `V$MANAGED_STANDBY` — 적용이 도는가 (지연은 모른다)</a:t>
+              <a:t>•  </a:t>
+            </a:r>
+            <a:r>
+              <a:rPr sz="1700" b="0">
+                <a:solidFill>
+                  <a:srgbClr val="222222"/>
+                </a:solidFill>
+                <a:latin typeface="Consolas"/>
+                <a:cs typeface="Consolas"/>
+              </a:rPr>
+              <a:t>V$MANAGED_STANDBY</a:t>
+            </a:r>
+            <a:r>
+              <a:rPr sz="1700" b="0">
+                <a:solidFill>
+                  <a:srgbClr val="222222"/>
+                </a:solidFill>
+                <a:latin typeface="맑은 고딕"/>
+              </a:rPr>
+              <a:t> — 적용이 도는가 (지연은 모른다)</a:t>
             </a:r>
           </a:p>
           <a:p>
@@ -10827,7 +11887,26 @@
                 </a:solidFill>
                 <a:latin typeface="맑은 고딕"/>
               </a:rPr>
-              <a:t>•  `V$DATAGUARD_STATS` — 지금 얼마나 뒤처졌나 (십수 초 전 정보)</a:t>
+              <a:t>•  </a:t>
+            </a:r>
+            <a:r>
+              <a:rPr sz="1700" b="0">
+                <a:solidFill>
+                  <a:srgbClr val="222222"/>
+                </a:solidFill>
+                <a:latin typeface="Consolas"/>
+                <a:cs typeface="Consolas"/>
+              </a:rPr>
+              <a:t>V$DATAGUARD_STATS</a:t>
+            </a:r>
+            <a:r>
+              <a:rPr sz="1700" b="0">
+                <a:solidFill>
+                  <a:srgbClr val="222222"/>
+                </a:solidFill>
+                <a:latin typeface="맑은 고딕"/>
+              </a:rPr>
+              <a:t> — 지금 얼마나 뒤처졌나 (십수 초 전 정보)</a:t>
             </a:r>
           </a:p>
           <a:p>
@@ -10843,7 +11922,26 @@
                 </a:solidFill>
                 <a:latin typeface="맑은 고딕"/>
               </a:rPr>
-              <a:t>•  `V$STANDBY_EVENT_HISTOGRAM` — 그동안 안정적이었나 (언제인지 모른다)</a:t>
+              <a:t>•  </a:t>
+            </a:r>
+            <a:r>
+              <a:rPr sz="1700" b="0">
+                <a:solidFill>
+                  <a:srgbClr val="222222"/>
+                </a:solidFill>
+                <a:latin typeface="Consolas"/>
+                <a:cs typeface="Consolas"/>
+              </a:rPr>
+              <a:t>V$STANDBY_EVENT_HISTOGRAM</a:t>
+            </a:r>
+            <a:r>
+              <a:rPr sz="1700" b="0">
+                <a:solidFill>
+                  <a:srgbClr val="222222"/>
+                </a:solidFill>
+                <a:latin typeface="맑은 고딕"/>
+              </a:rPr>
+              <a:t> — 그동안 안정적이었나 (언제인지 모른다)</a:t>
             </a:r>
           </a:p>
           <a:p>
@@ -10859,7 +11957,25 @@
                 </a:solidFill>
                 <a:latin typeface="맑은 고딕"/>
               </a:rPr>
-              <a:t>•  **MRP0 을 먼저 본다** — 없으면 나머지는 무의미하다</a:t>
+              <a:t>•  </a:t>
+            </a:r>
+            <a:r>
+              <a:rPr sz="1700" b="1">
+                <a:solidFill>
+                  <a:srgbClr val="222222"/>
+                </a:solidFill>
+                <a:latin typeface="맑은 고딕"/>
+              </a:rPr>
+              <a:t>MRP0 을 먼저 본다</a:t>
+            </a:r>
+            <a:r>
+              <a:rPr sz="1700" b="0">
+                <a:solidFill>
+                  <a:srgbClr val="222222"/>
+                </a:solidFill>
+                <a:latin typeface="맑은 고딕"/>
+              </a:rPr>
+              <a:t> — 없으면 나머지는 무의미하다</a:t>
             </a:r>
           </a:p>
         </p:txBody>
@@ -11054,7 +12170,25 @@
                 </a:solidFill>
                 <a:latin typeface="맑은 고딕"/>
               </a:rPr>
-              <a:t>•  일반 테이블을 임시 저장소로 쓰는 조회 → **GTT 로 바꿔야** 옮길 수 있다</a:t>
+              <a:t>•  일반 테이블을 임시 저장소로 쓰는 조회 → </a:t>
+            </a:r>
+            <a:r>
+              <a:rPr sz="1700" b="1">
+                <a:solidFill>
+                  <a:srgbClr val="222222"/>
+                </a:solidFill>
+                <a:latin typeface="맑은 고딕"/>
+              </a:rPr>
+              <a:t>GTT 로 바꿔야</a:t>
+            </a:r>
+            <a:r>
+              <a:rPr sz="1700" b="0">
+                <a:solidFill>
+                  <a:srgbClr val="222222"/>
+                </a:solidFill>
+                <a:latin typeface="맑은 고딕"/>
+              </a:rPr>
+              <a:t> 옮길 수 있다</a:t>
             </a:r>
           </a:p>
           <a:p>
@@ -11265,7 +12399,25 @@
                 </a:solidFill>
                 <a:latin typeface="맑은 고딕"/>
               </a:rPr>
-              <a:t>•  기능 검증은 **애플리케이션 계정**으로 한다 — SYS 로 두 번 오판할 뻔했다</a:t>
+              <a:t>•  기능 검증은 </a:t>
+            </a:r>
+            <a:r>
+              <a:rPr sz="1700" b="1">
+                <a:solidFill>
+                  <a:srgbClr val="222222"/>
+                </a:solidFill>
+                <a:latin typeface="맑은 고딕"/>
+              </a:rPr>
+              <a:t>애플리케이션 계정</a:t>
+            </a:r>
+            <a:r>
+              <a:rPr sz="1700" b="0">
+                <a:solidFill>
+                  <a:srgbClr val="222222"/>
+                </a:solidFill>
+                <a:latin typeface="맑은 고딕"/>
+              </a:rPr>
+              <a:t>으로 한다 — SYS 로 두 번 오판할 뻔했다</a:t>
             </a:r>
           </a:p>
           <a:p>
@@ -11281,7 +12433,25 @@
                 </a:solidFill>
                 <a:latin typeface="맑은 고딕"/>
               </a:rPr>
-              <a:t>•  예상과 다르면 **측정을 먼저 의심**한다 — SQL*Plus 암묵적 커밋</a:t>
+              <a:t>•  예상과 다르면 </a:t>
+            </a:r>
+            <a:r>
+              <a:rPr sz="1700" b="1">
+                <a:solidFill>
+                  <a:srgbClr val="222222"/>
+                </a:solidFill>
+                <a:latin typeface="맑은 고딕"/>
+              </a:rPr>
+              <a:t>측정을 먼저 의심</a:t>
+            </a:r>
+            <a:r>
+              <a:rPr sz="1700" b="0">
+                <a:solidFill>
+                  <a:srgbClr val="222222"/>
+                </a:solidFill>
+                <a:latin typeface="맑은 고딕"/>
+              </a:rPr>
+              <a:t>한다 — SQL*Plus 암묵적 커밋</a:t>
             </a:r>
           </a:p>
           <a:p>
@@ -11297,7 +12467,25 @@
                 </a:solidFill>
                 <a:latin typeface="맑은 고딕"/>
               </a:rPr>
-              <a:t>•  오류 번호를 **경로 정보**로 읽는다 — 16000 대 16397, 16000 대 13516</a:t>
+              <a:t>•  오류 번호를 </a:t>
+            </a:r>
+            <a:r>
+              <a:rPr sz="1700" b="1">
+                <a:solidFill>
+                  <a:srgbClr val="222222"/>
+                </a:solidFill>
+                <a:latin typeface="맑은 고딕"/>
+              </a:rPr>
+              <a:t>경로 정보</a:t>
+            </a:r>
+            <a:r>
+              <a:rPr sz="1700" b="0">
+                <a:solidFill>
+                  <a:srgbClr val="222222"/>
+                </a:solidFill>
+                <a:latin typeface="맑은 고딕"/>
+              </a:rPr>
+              <a:t>로 읽는다 — 16000 대 16397, 16000 대 13516</a:t>
             </a:r>
           </a:p>
         </p:txBody>
@@ -11715,7 +12903,82 @@
                 </a:solidFill>
                 <a:latin typeface="맑은 고딕"/>
               </a:rPr>
-              <a:t>•  `OPEN_MODE` **MOUNTED**, `MRP0` 은 `APPLYING_LOG` 그대로</a:t>
+              <a:t>•  </a:t>
+            </a:r>
+            <a:r>
+              <a:rPr sz="1700" b="0">
+                <a:solidFill>
+                  <a:srgbClr val="222222"/>
+                </a:solidFill>
+                <a:latin typeface="Consolas"/>
+                <a:cs typeface="Consolas"/>
+              </a:rPr>
+              <a:t>OPEN_MODE</a:t>
+            </a:r>
+            <a:r>
+              <a:rPr sz="1700" b="0">
+                <a:solidFill>
+                  <a:srgbClr val="222222"/>
+                </a:solidFill>
+                <a:latin typeface="맑은 고딕"/>
+              </a:rPr>
+              <a:t> </a:t>
+            </a:r>
+            <a:r>
+              <a:rPr sz="1700" b="1">
+                <a:solidFill>
+                  <a:srgbClr val="222222"/>
+                </a:solidFill>
+                <a:latin typeface="맑은 고딕"/>
+              </a:rPr>
+              <a:t>MOUNTED</a:t>
+            </a:r>
+            <a:r>
+              <a:rPr sz="1700" b="0">
+                <a:solidFill>
+                  <a:srgbClr val="222222"/>
+                </a:solidFill>
+                <a:latin typeface="맑은 고딕"/>
+              </a:rPr>
+              <a:t>, </a:t>
+            </a:r>
+            <a:r>
+              <a:rPr sz="1700" b="0">
+                <a:solidFill>
+                  <a:srgbClr val="222222"/>
+                </a:solidFill>
+                <a:latin typeface="Consolas"/>
+                <a:cs typeface="Consolas"/>
+              </a:rPr>
+              <a:t>MRP0</a:t>
+            </a:r>
+            <a:r>
+              <a:rPr sz="1700" b="0">
+                <a:solidFill>
+                  <a:srgbClr val="222222"/>
+                </a:solidFill>
+                <a:latin typeface="맑은 고딕"/>
+              </a:rPr>
+              <a:t> 은 </a:t>
+            </a:r>
+            <a:r>
+              <a:rPr sz="1700" b="0">
+                <a:solidFill>
+                  <a:srgbClr val="222222"/>
+                </a:solidFill>
+                <a:latin typeface="Consolas"/>
+                <a:cs typeface="Consolas"/>
+              </a:rPr>
+              <a:t>APPLYING_LOG</a:t>
+            </a:r>
+            <a:r>
+              <a:rPr sz="1700" b="0">
+                <a:solidFill>
+                  <a:srgbClr val="222222"/>
+                </a:solidFill>
+                <a:latin typeface="맑은 고딕"/>
+              </a:rPr>
+              <a:t> 그대로</a:t>
             </a:r>
           </a:p>
           <a:p>
@@ -11731,7 +12994,45 @@
                 </a:solidFill>
                 <a:latin typeface="맑은 고딕"/>
               </a:rPr>
-              <a:t>•  사용자 표 조회 → **`ORA-01219`** (9.4 의 `ORA-16000` 과 다르다)</a:t>
+              <a:t>•  사용자 표 조회 → </a:t>
+            </a:r>
+            <a:r>
+              <a:rPr sz="1700" b="1">
+                <a:solidFill>
+                  <a:srgbClr val="222222"/>
+                </a:solidFill>
+                <a:latin typeface="Consolas"/>
+                <a:cs typeface="Consolas"/>
+              </a:rPr>
+              <a:t>ORA-01219</a:t>
+            </a:r>
+            <a:r>
+              <a:rPr sz="1700" b="0">
+                <a:solidFill>
+                  <a:srgbClr val="222222"/>
+                </a:solidFill>
+                <a:latin typeface="맑은 고딕"/>
+              </a:rPr>
+              <a:t> (9.4 의 </a:t>
+            </a:r>
+            <a:r>
+              <a:rPr sz="1700" b="0">
+                <a:solidFill>
+                  <a:srgbClr val="222222"/>
+                </a:solidFill>
+                <a:latin typeface="Consolas"/>
+                <a:cs typeface="Consolas"/>
+              </a:rPr>
+              <a:t>ORA-16000</a:t>
+            </a:r>
+            <a:r>
+              <a:rPr sz="1700" b="0">
+                <a:solidFill>
+                  <a:srgbClr val="222222"/>
+                </a:solidFill>
+                <a:latin typeface="맑은 고딕"/>
+              </a:rPr>
+              <a:t> 과 다르다)</a:t>
             </a:r>
           </a:p>
           <a:p>
@@ -11747,7 +13048,16 @@
                 </a:solidFill>
                 <a:latin typeface="맑은 고딕"/>
               </a:rPr>
-              <a:t>•  메시지의 뒷부분 — **"fixed tables or views only"**</a:t>
+              <a:t>•  메시지의 뒷부분 — </a:t>
+            </a:r>
+            <a:r>
+              <a:rPr sz="1700" b="1">
+                <a:solidFill>
+                  <a:srgbClr val="222222"/>
+                </a:solidFill>
+                <a:latin typeface="맑은 고딕"/>
+              </a:rPr>
+              <a:t>"fixed tables or views only"</a:t>
             </a:r>
           </a:p>
           <a:p>
@@ -11763,7 +13073,35 @@
                 </a:solidFill>
                 <a:latin typeface="맑은 고딕"/>
               </a:rPr>
-              <a:t>•  그래서 `V$DATAGUARD_STATS` 는 **닫혀 있어도 값이 나온다**</a:t>
+              <a:t>•  그래서 </a:t>
+            </a:r>
+            <a:r>
+              <a:rPr sz="1700" b="0">
+                <a:solidFill>
+                  <a:srgbClr val="222222"/>
+                </a:solidFill>
+                <a:latin typeface="Consolas"/>
+                <a:cs typeface="Consolas"/>
+              </a:rPr>
+              <a:t>V$DATAGUARD_STATS</a:t>
+            </a:r>
+            <a:r>
+              <a:rPr sz="1700" b="0">
+                <a:solidFill>
+                  <a:srgbClr val="222222"/>
+                </a:solidFill>
+                <a:latin typeface="맑은 고딕"/>
+              </a:rPr>
+              <a:t> 는 </a:t>
+            </a:r>
+            <a:r>
+              <a:rPr sz="1700" b="1">
+                <a:solidFill>
+                  <a:srgbClr val="222222"/>
+                </a:solidFill>
+                <a:latin typeface="맑은 고딕"/>
+              </a:rPr>
+              <a:t>닫혀 있어도 값이 나온다</a:t>
             </a:r>
           </a:p>
         </p:txBody>
@@ -11942,7 +13280,55 @@
                 </a:solidFill>
                 <a:latin typeface="맑은 고딕"/>
               </a:rPr>
-              <a:t>•  `DATABASE_MODE` — `OPEN_READ-ONLY` ↔ **`MOUNTED-STANDBY`**</a:t>
+              <a:t>•  </a:t>
+            </a:r>
+            <a:r>
+              <a:rPr sz="1700" b="0">
+                <a:solidFill>
+                  <a:srgbClr val="222222"/>
+                </a:solidFill>
+                <a:latin typeface="Consolas"/>
+                <a:cs typeface="Consolas"/>
+              </a:rPr>
+              <a:t>DATABASE_MODE</a:t>
+            </a:r>
+            <a:r>
+              <a:rPr sz="1700" b="0">
+                <a:solidFill>
+                  <a:srgbClr val="222222"/>
+                </a:solidFill>
+                <a:latin typeface="맑은 고딕"/>
+              </a:rPr>
+              <a:t> — </a:t>
+            </a:r>
+            <a:r>
+              <a:rPr sz="1700" b="0">
+                <a:solidFill>
+                  <a:srgbClr val="222222"/>
+                </a:solidFill>
+                <a:latin typeface="Consolas"/>
+                <a:cs typeface="Consolas"/>
+              </a:rPr>
+              <a:t>OPEN_READ-ONLY</a:t>
+            </a:r>
+            <a:r>
+              <a:rPr sz="1700" b="0">
+                <a:solidFill>
+                  <a:srgbClr val="222222"/>
+                </a:solidFill>
+                <a:latin typeface="맑은 고딕"/>
+              </a:rPr>
+              <a:t> ↔ </a:t>
+            </a:r>
+            <a:r>
+              <a:rPr sz="1700" b="1">
+                <a:solidFill>
+                  <a:srgbClr val="222222"/>
+                </a:solidFill>
+                <a:latin typeface="Consolas"/>
+                <a:cs typeface="Consolas"/>
+              </a:rPr>
+              <a:t>MOUNTED-STANDBY</a:t>
             </a:r>
           </a:p>
           <a:p>
@@ -11958,7 +13344,64 @@
                 </a:solidFill>
                 <a:latin typeface="맑은 고딕"/>
               </a:rPr>
-              <a:t>•  `RECOVERY_MODE` — `... REAL TIME APPLY` **`WITH QUERY`** 유무</a:t>
+              <a:t>•  </a:t>
+            </a:r>
+            <a:r>
+              <a:rPr sz="1700" b="0">
+                <a:solidFill>
+                  <a:srgbClr val="222222"/>
+                </a:solidFill>
+                <a:latin typeface="Consolas"/>
+                <a:cs typeface="Consolas"/>
+              </a:rPr>
+              <a:t>RECOVERY_MODE</a:t>
+            </a:r>
+            <a:r>
+              <a:rPr sz="1700" b="0">
+                <a:solidFill>
+                  <a:srgbClr val="222222"/>
+                </a:solidFill>
+                <a:latin typeface="맑은 고딕"/>
+              </a:rPr>
+              <a:t> — </a:t>
+            </a:r>
+            <a:r>
+              <a:rPr sz="1700" b="0">
+                <a:solidFill>
+                  <a:srgbClr val="222222"/>
+                </a:solidFill>
+                <a:latin typeface="Consolas"/>
+                <a:cs typeface="Consolas"/>
+              </a:rPr>
+              <a:t>... REAL TIME APPLY</a:t>
+            </a:r>
+            <a:r>
+              <a:rPr sz="1700" b="0">
+                <a:solidFill>
+                  <a:srgbClr val="222222"/>
+                </a:solidFill>
+                <a:latin typeface="맑은 고딕"/>
+              </a:rPr>
+              <a:t> </a:t>
+            </a:r>
+            <a:r>
+              <a:rPr sz="1700" b="1">
+                <a:solidFill>
+                  <a:srgbClr val="222222"/>
+                </a:solidFill>
+                <a:latin typeface="Consolas"/>
+                <a:cs typeface="Consolas"/>
+              </a:rPr>
+              <a:t>WITH QUERY</a:t>
+            </a:r>
+            <a:r>
+              <a:rPr sz="1700" b="0">
+                <a:solidFill>
+                  <a:srgbClr val="222222"/>
+                </a:solidFill>
+                <a:latin typeface="맑은 고딕"/>
+              </a:rPr>
+              <a:t> 유무</a:t>
             </a:r>
           </a:p>
           <a:p>
@@ -11974,7 +13417,26 @@
                 </a:solidFill>
                 <a:latin typeface="맑은 고딕"/>
               </a:rPr>
-              <a:t>•  `APPLIED_SEQ#` 는 닫은 뒤에도 올라간다 (8 → 10)</a:t>
+              <a:t>•  </a:t>
+            </a:r>
+            <a:r>
+              <a:rPr sz="1700" b="0">
+                <a:solidFill>
+                  <a:srgbClr val="222222"/>
+                </a:solidFill>
+                <a:latin typeface="Consolas"/>
+                <a:cs typeface="Consolas"/>
+              </a:rPr>
+              <a:t>APPLIED_SEQ#</a:t>
+            </a:r>
+            <a:r>
+              <a:rPr sz="1700" b="0">
+                <a:solidFill>
+                  <a:srgbClr val="222222"/>
+                </a:solidFill>
+                <a:latin typeface="맑은 고딕"/>
+              </a:rPr>
+              <a:t> 는 닫은 뒤에도 올라간다 (8 → 10)</a:t>
             </a:r>
           </a:p>
           <a:p>
@@ -11990,7 +13452,44 @@
                 </a:solidFill>
                 <a:latin typeface="맑은 고딕"/>
               </a:rPr>
-              <a:t>•  `V$DATAGUARD_STATS` 는 Primary 에서 **0행** — 이 방법은 성립하지 않는다</a:t>
+              <a:t>•  </a:t>
+            </a:r>
+            <a:r>
+              <a:rPr sz="1700" b="0">
+                <a:solidFill>
+                  <a:srgbClr val="222222"/>
+                </a:solidFill>
+                <a:latin typeface="Consolas"/>
+                <a:cs typeface="Consolas"/>
+              </a:rPr>
+              <a:t>V$DATAGUARD_STATS</a:t>
+            </a:r>
+            <a:r>
+              <a:rPr sz="1700" b="0">
+                <a:solidFill>
+                  <a:srgbClr val="222222"/>
+                </a:solidFill>
+                <a:latin typeface="맑은 고딕"/>
+              </a:rPr>
+              <a:t> 는 Primary 에서 </a:t>
+            </a:r>
+            <a:r>
+              <a:rPr sz="1700" b="1">
+                <a:solidFill>
+                  <a:srgbClr val="222222"/>
+                </a:solidFill>
+                <a:latin typeface="맑은 고딕"/>
+              </a:rPr>
+              <a:t>0행</a:t>
+            </a:r>
+            <a:r>
+              <a:rPr sz="1700" b="0">
+                <a:solidFill>
+                  <a:srgbClr val="222222"/>
+                </a:solidFill>
+                <a:latin typeface="맑은 고딕"/>
+              </a:rPr>
+              <a:t> — 이 방법은 성립하지 않는다</a:t>
             </a:r>
           </a:p>
         </p:txBody>
@@ -12194,7 +13693,26 @@
                 </a:solidFill>
                 <a:latin typeface="맑은 고딕"/>
               </a:rPr>
-              <a:t>•  Q5. DML 리다이렉션이 `SYS` 로 실패하는 이유와, 그것이 기능 검증에 주는 교훈은?</a:t>
+              <a:t>•  Q5. DML 리다이렉션이 </a:t>
+            </a:r>
+            <a:r>
+              <a:rPr sz="1600" b="0">
+                <a:solidFill>
+                  <a:srgbClr val="222222"/>
+                </a:solidFill>
+                <a:latin typeface="Consolas"/>
+                <a:cs typeface="Consolas"/>
+              </a:rPr>
+              <a:t>SYS</a:t>
+            </a:r>
+            <a:r>
+              <a:rPr sz="1600" b="0">
+                <a:solidFill>
+                  <a:srgbClr val="222222"/>
+                </a:solidFill>
+                <a:latin typeface="맑은 고딕"/>
+              </a:rPr>
+              <a:t> 로 실패하는 이유와, 그것이 기능 검증에 주는 교훈은?</a:t>
             </a:r>
           </a:p>
           <a:p>
@@ -12210,7 +13728,26 @@
                 </a:solidFill>
                 <a:latin typeface="맑은 고딕"/>
               </a:rPr>
-              <a:t>•  Q6. ASYNC 구성에서 `SYNC WITH PRIMARY` 가 거부되는 이유를 보호 모드와 연결해 설명하라.</a:t>
+              <a:t>•  Q6. ASYNC 구성에서 </a:t>
+            </a:r>
+            <a:r>
+              <a:rPr sz="1600" b="0">
+                <a:solidFill>
+                  <a:srgbClr val="222222"/>
+                </a:solidFill>
+                <a:latin typeface="Consolas"/>
+                <a:cs typeface="Consolas"/>
+              </a:rPr>
+              <a:t>SYNC WITH PRIMARY</a:t>
+            </a:r>
+            <a:r>
+              <a:rPr sz="1600" b="0">
+                <a:solidFill>
+                  <a:srgbClr val="222222"/>
+                </a:solidFill>
+                <a:latin typeface="맑은 고딕"/>
+              </a:rPr>
+              <a:t> 가 거부되는 이유를 보호 모드와 연결해 설명하라.</a:t>
             </a:r>
           </a:p>
         </p:txBody>
@@ -12350,7 +13887,45 @@
                 </a:solidFill>
                 <a:latin typeface="맑은 고딕"/>
               </a:rPr>
-              <a:t>•  ADG 의 표식은 `OPEN_MODE = READ ONLY WITH APPLY` 와 `RECOVERY_MODE = MANAGED REAL TIME APPLY` 두 가지다.</a:t>
+              <a:t>•  ADG 의 표식은 </a:t>
+            </a:r>
+            <a:r>
+              <a:rPr sz="1600" b="0">
+                <a:solidFill>
+                  <a:srgbClr val="222222"/>
+                </a:solidFill>
+                <a:latin typeface="Consolas"/>
+                <a:cs typeface="Consolas"/>
+              </a:rPr>
+              <a:t>OPEN_MODE = READ ONLY WITH APPLY</a:t>
+            </a:r>
+            <a:r>
+              <a:rPr sz="1600" b="0">
+                <a:solidFill>
+                  <a:srgbClr val="222222"/>
+                </a:solidFill>
+                <a:latin typeface="맑은 고딕"/>
+              </a:rPr>
+              <a:t> 와 </a:t>
+            </a:r>
+            <a:r>
+              <a:rPr sz="1600" b="0">
+                <a:solidFill>
+                  <a:srgbClr val="222222"/>
+                </a:solidFill>
+                <a:latin typeface="Consolas"/>
+                <a:cs typeface="Consolas"/>
+              </a:rPr>
+              <a:t>RECOVERY_MODE = MANAGED REAL TIME APPLY</a:t>
+            </a:r>
+            <a:r>
+              <a:rPr sz="1600" b="0">
+                <a:solidFill>
+                  <a:srgbClr val="222222"/>
+                </a:solidFill>
+                <a:latin typeface="맑은 고딕"/>
+              </a:rPr>
+              <a:t> 두 가지다.</a:t>
             </a:r>
           </a:p>
           <a:p>
@@ -12366,7 +13941,45 @@
                 </a:solidFill>
                 <a:latin typeface="맑은 고딕"/>
               </a:rPr>
-              <a:t>•  기능 사용 통계는 `CDB_` 뷰의 CON_ID 3 에만 있고 `DETECTED_USAGES` 는 0이었다. 라이선스 근거로는 부족하다.</a:t>
+              <a:t>•  기능 사용 통계는 </a:t>
+            </a:r>
+            <a:r>
+              <a:rPr sz="1600" b="0">
+                <a:solidFill>
+                  <a:srgbClr val="222222"/>
+                </a:solidFill>
+                <a:latin typeface="Consolas"/>
+                <a:cs typeface="Consolas"/>
+              </a:rPr>
+              <a:t>CDB_</a:t>
+            </a:r>
+            <a:r>
+              <a:rPr sz="1600" b="0">
+                <a:solidFill>
+                  <a:srgbClr val="222222"/>
+                </a:solidFill>
+                <a:latin typeface="맑은 고딕"/>
+              </a:rPr>
+              <a:t> 뷰의 CON_ID 3 에만 있고 </a:t>
+            </a:r>
+            <a:r>
+              <a:rPr sz="1600" b="0">
+                <a:solidFill>
+                  <a:srgbClr val="222222"/>
+                </a:solidFill>
+                <a:latin typeface="Consolas"/>
+                <a:cs typeface="Consolas"/>
+              </a:rPr>
+              <a:t>DETECTED_USAGES</a:t>
+            </a:r>
+            <a:r>
+              <a:rPr sz="1600" b="0">
+                <a:solidFill>
+                  <a:srgbClr val="222222"/>
+                </a:solidFill>
+                <a:latin typeface="맑은 고딕"/>
+              </a:rPr>
+              <a:t> 는 0이었다. 라이선스 근거로는 부족하다.</a:t>
             </a:r>
           </a:p>
           <a:p>
@@ -12398,7 +14011,25 @@
                 </a:solidFill>
                 <a:latin typeface="맑은 고딕"/>
               </a:rPr>
-              <a:t>•  Standby 조회는 **커밋된 데이터만** 보여 준다. 리두와 함께 UNDO 도 적용되기 때문이다.</a:t>
+              <a:t>•  Standby 조회는 </a:t>
+            </a:r>
+            <a:r>
+              <a:rPr sz="1600" b="1">
+                <a:solidFill>
+                  <a:srgbClr val="222222"/>
+                </a:solidFill>
+                <a:latin typeface="맑은 고딕"/>
+              </a:rPr>
+              <a:t>커밋된 데이터만</a:t>
+            </a:r>
+            <a:r>
+              <a:rPr sz="1600" b="0">
+                <a:solidFill>
+                  <a:srgbClr val="222222"/>
+                </a:solidFill>
+                <a:latin typeface="맑은 고딕"/>
+              </a:rPr>
+              <a:t> 보여 준다. 리두와 함께 UNDO 도 적용되기 때문이다.</a:t>
             </a:r>
           </a:p>
           <a:p>
@@ -12414,7 +14045,26 @@
                 </a:solidFill>
                 <a:latin typeface="맑은 고딕"/>
               </a:rPr>
-              <a:t>•  SQL*Plus 는 `EXIT` 시 암묵적으로 커밋한다. 이 때문에 첫 측정이 잘못된 결론을 낼 뻔했다.</a:t>
+              <a:t>•  SQL*Plus 는 </a:t>
+            </a:r>
+            <a:r>
+              <a:rPr sz="1600" b="0">
+                <a:solidFill>
+                  <a:srgbClr val="222222"/>
+                </a:solidFill>
+                <a:latin typeface="Consolas"/>
+                <a:cs typeface="Consolas"/>
+              </a:rPr>
+              <a:t>EXIT</a:t>
+            </a:r>
+            <a:r>
+              <a:rPr sz="1600" b="0">
+                <a:solidFill>
+                  <a:srgbClr val="222222"/>
+                </a:solidFill>
+                <a:latin typeface="맑은 고딕"/>
+              </a:rPr>
+              <a:t> 시 암묵적으로 커밋한다. 이 때문에 첫 측정이 잘못된 결론을 낼 뻔했다.</a:t>
             </a:r>
           </a:p>
           <a:p>
@@ -12430,7 +14080,63 @@
                 </a:solidFill>
                 <a:latin typeface="맑은 고딕"/>
               </a:rPr>
-              <a:t>•  쓰기는 모두 **ORA-16000** 이다. `INSERT`·`UPDATE`·DDL 이 같은 오류다.</a:t>
+              <a:t>•  쓰기는 모두 </a:t>
+            </a:r>
+            <a:r>
+              <a:rPr sz="1600" b="1">
+                <a:solidFill>
+                  <a:srgbClr val="222222"/>
+                </a:solidFill>
+                <a:latin typeface="맑은 고딕"/>
+              </a:rPr>
+              <a:t>ORA-16000</a:t>
+            </a:r>
+            <a:r>
+              <a:rPr sz="1600" b="0">
+                <a:solidFill>
+                  <a:srgbClr val="222222"/>
+                </a:solidFill>
+                <a:latin typeface="맑은 고딕"/>
+              </a:rPr>
+              <a:t> 이다. </a:t>
+            </a:r>
+            <a:r>
+              <a:rPr sz="1600" b="0">
+                <a:solidFill>
+                  <a:srgbClr val="222222"/>
+                </a:solidFill>
+                <a:latin typeface="Consolas"/>
+                <a:cs typeface="Consolas"/>
+              </a:rPr>
+              <a:t>INSERT</a:t>
+            </a:r>
+            <a:r>
+              <a:rPr sz="1600" b="0">
+                <a:solidFill>
+                  <a:srgbClr val="222222"/>
+                </a:solidFill>
+                <a:latin typeface="맑은 고딕"/>
+              </a:rPr>
+              <a:t>·</a:t>
+            </a:r>
+            <a:r>
+              <a:rPr sz="1600" b="0">
+                <a:solidFill>
+                  <a:srgbClr val="222222"/>
+                </a:solidFill>
+                <a:latin typeface="Consolas"/>
+                <a:cs typeface="Consolas"/>
+              </a:rPr>
+              <a:t>UPDATE</a:t>
+            </a:r>
+            <a:r>
+              <a:rPr sz="1600" b="0">
+                <a:solidFill>
+                  <a:srgbClr val="222222"/>
+                </a:solidFill>
+                <a:latin typeface="맑은 고딕"/>
+              </a:rPr>
+              <a:t>·DDL 이 같은 오류다.</a:t>
             </a:r>
           </a:p>
           <a:p>
@@ -12462,7 +14168,45 @@
                 </a:solidFill>
                 <a:latin typeface="맑은 고딕"/>
               </a:rPr>
-              <a:t>•  `EXPLAIN PLAN` 과 GTT `INSERT` 도 된다. 데이터가 임시 테이블스페이스에 있기 때문이다.</a:t>
+              <a:t>•  </a:t>
+            </a:r>
+            <a:r>
+              <a:rPr sz="1600" b="0">
+                <a:solidFill>
+                  <a:srgbClr val="222222"/>
+                </a:solidFill>
+                <a:latin typeface="Consolas"/>
+                <a:cs typeface="Consolas"/>
+              </a:rPr>
+              <a:t>EXPLAIN PLAN</a:t>
+            </a:r>
+            <a:r>
+              <a:rPr sz="1600" b="0">
+                <a:solidFill>
+                  <a:srgbClr val="222222"/>
+                </a:solidFill>
+                <a:latin typeface="맑은 고딕"/>
+              </a:rPr>
+              <a:t> 과 GTT </a:t>
+            </a:r>
+            <a:r>
+              <a:rPr sz="1600" b="0">
+                <a:solidFill>
+                  <a:srgbClr val="222222"/>
+                </a:solidFill>
+                <a:latin typeface="Consolas"/>
+                <a:cs typeface="Consolas"/>
+              </a:rPr>
+              <a:t>INSERT</a:t>
+            </a:r>
+            <a:r>
+              <a:rPr sz="1600" b="0">
+                <a:solidFill>
+                  <a:srgbClr val="222222"/>
+                </a:solidFill>
+                <a:latin typeface="맑은 고딕"/>
+              </a:rPr>
+              <a:t> 도 된다. 데이터가 임시 테이블스페이스에 있기 때문이다.</a:t>
             </a:r>
           </a:p>
           <a:p>
@@ -12478,7 +14222,25 @@
                 </a:solidFill>
                 <a:latin typeface="맑은 고딕"/>
               </a:rPr>
-              <a:t>•  시퀀스도 되지만 **값이 뛴다.** Primary 에서 1이었던 시퀀스가 Standby 에서 21을 돌려주었다.</a:t>
+              <a:t>•  시퀀스도 되지만 </a:t>
+            </a:r>
+            <a:r>
+              <a:rPr sz="1600" b="1">
+                <a:solidFill>
+                  <a:srgbClr val="222222"/>
+                </a:solidFill>
+                <a:latin typeface="맑은 고딕"/>
+              </a:rPr>
+              <a:t>값이 뛴다.</a:t>
+            </a:r>
+            <a:r>
+              <a:rPr sz="1600" b="0">
+                <a:solidFill>
+                  <a:srgbClr val="222222"/>
+                </a:solidFill>
+                <a:latin typeface="맑은 고딕"/>
+              </a:rPr>
+              <a:t> Primary 에서 1이었던 시퀀스가 Standby 에서 21을 돌려주었다.</a:t>
             </a:r>
           </a:p>
           <a:p>
@@ -12494,7 +14256,44 @@
                 </a:solidFill>
                 <a:latin typeface="맑은 고딕"/>
               </a:rPr>
-              <a:t>•  통계 수집은 ORA-16000, AWR 은 전용 오류 **ORA-13516**. `V$` 뷰 조회는 자유롭다.</a:t>
+              <a:t>•  통계 수집은 ORA-16000, AWR 은 전용 오류 </a:t>
+            </a:r>
+            <a:r>
+              <a:rPr sz="1600" b="1">
+                <a:solidFill>
+                  <a:srgbClr val="222222"/>
+                </a:solidFill>
+                <a:latin typeface="맑은 고딕"/>
+              </a:rPr>
+              <a:t>ORA-13516</a:t>
+            </a:r>
+            <a:r>
+              <a:rPr sz="1600" b="0">
+                <a:solidFill>
+                  <a:srgbClr val="222222"/>
+                </a:solidFill>
+                <a:latin typeface="맑은 고딕"/>
+              </a:rPr>
+              <a:t>. </a:t>
+            </a:r>
+            <a:r>
+              <a:rPr sz="1600" b="0">
+                <a:solidFill>
+                  <a:srgbClr val="222222"/>
+                </a:solidFill>
+                <a:latin typeface="Consolas"/>
+                <a:cs typeface="Consolas"/>
+              </a:rPr>
+              <a:t>V$</a:t>
+            </a:r>
+            <a:r>
+              <a:rPr sz="1600" b="0">
+                <a:solidFill>
+                  <a:srgbClr val="222222"/>
+                </a:solidFill>
+                <a:latin typeface="맑은 고딕"/>
+              </a:rPr>
+              <a:t> 뷰 조회는 자유롭다.</a:t>
             </a:r>
           </a:p>
           <a:p>
@@ -12510,7 +14309,25 @@
                 </a:solidFill>
                 <a:latin typeface="맑은 고딕"/>
               </a:rPr>
-              <a:t>•  경계를 가르는 기준은 **영구 데이터 파일이나 딕셔너리를 바꾸는가** 하나다.</a:t>
+              <a:t>•  경계를 가르는 기준은 </a:t>
+            </a:r>
+            <a:r>
+              <a:rPr sz="1600" b="1">
+                <a:solidFill>
+                  <a:srgbClr val="222222"/>
+                </a:solidFill>
+                <a:latin typeface="맑은 고딕"/>
+              </a:rPr>
+              <a:t>영구 데이터 파일이나 딕셔너리를 바꾸는가</a:t>
+            </a:r>
+            <a:r>
+              <a:rPr sz="1600" b="0">
+                <a:solidFill>
+                  <a:srgbClr val="222222"/>
+                </a:solidFill>
+                <a:latin typeface="맑은 고딕"/>
+              </a:rPr>
+              <a:t> 하나다.</a:t>
             </a:r>
           </a:p>
           <a:p>
@@ -12526,7 +14343,64 @@
                 </a:solidFill>
                 <a:latin typeface="맑은 고딕"/>
               </a:rPr>
-              <a:t>•  DML 리다이렉션은 일반 사용자로 `INSERT`·`UPDATE`·`DELETE` 가 모두 성공하며 Primary 에 반영된다.</a:t>
+              <a:t>•  DML 리다이렉션은 일반 사용자로 </a:t>
+            </a:r>
+            <a:r>
+              <a:rPr sz="1600" b="0">
+                <a:solidFill>
+                  <a:srgbClr val="222222"/>
+                </a:solidFill>
+                <a:latin typeface="Consolas"/>
+                <a:cs typeface="Consolas"/>
+              </a:rPr>
+              <a:t>INSERT</a:t>
+            </a:r>
+            <a:r>
+              <a:rPr sz="1600" b="0">
+                <a:solidFill>
+                  <a:srgbClr val="222222"/>
+                </a:solidFill>
+                <a:latin typeface="맑은 고딕"/>
+              </a:rPr>
+              <a:t>·</a:t>
+            </a:r>
+            <a:r>
+              <a:rPr sz="1600" b="0">
+                <a:solidFill>
+                  <a:srgbClr val="222222"/>
+                </a:solidFill>
+                <a:latin typeface="Consolas"/>
+                <a:cs typeface="Consolas"/>
+              </a:rPr>
+              <a:t>UPDATE</a:t>
+            </a:r>
+            <a:r>
+              <a:rPr sz="1600" b="0">
+                <a:solidFill>
+                  <a:srgbClr val="222222"/>
+                </a:solidFill>
+                <a:latin typeface="맑은 고딕"/>
+              </a:rPr>
+              <a:t>·</a:t>
+            </a:r>
+            <a:r>
+              <a:rPr sz="1600" b="0">
+                <a:solidFill>
+                  <a:srgbClr val="222222"/>
+                </a:solidFill>
+                <a:latin typeface="Consolas"/>
+                <a:cs typeface="Consolas"/>
+              </a:rPr>
+              <a:t>DELETE</a:t>
+            </a:r>
+            <a:r>
+              <a:rPr sz="1600" b="0">
+                <a:solidFill>
+                  <a:srgbClr val="222222"/>
+                </a:solidFill>
+                <a:latin typeface="맑은 고딕"/>
+              </a:rPr>
+              <a:t> 가 모두 성공하며 Primary 에 반영된다.</a:t>
             </a:r>
           </a:p>
           <a:p>
@@ -12542,7 +14416,35 @@
                 </a:solidFill>
                 <a:latin typeface="맑은 고딕"/>
               </a:rPr>
-              <a:t>•  **`SYS` 로는 ORA-16397 로 실패한다.** 관리자 계정으로 시험하면 기능이 없다고 오판하기 쉽다.</a:t>
+              <a:t>•  </a:t>
+            </a:r>
+            <a:r>
+              <a:rPr sz="1600" b="1">
+                <a:solidFill>
+                  <a:srgbClr val="222222"/>
+                </a:solidFill>
+                <a:latin typeface="Consolas"/>
+                <a:cs typeface="Consolas"/>
+              </a:rPr>
+              <a:t>SYS</a:t>
+            </a:r>
+            <a:r>
+              <a:rPr sz="1600" b="1">
+                <a:solidFill>
+                  <a:srgbClr val="222222"/>
+                </a:solidFill>
+                <a:latin typeface="맑은 고딕"/>
+              </a:rPr>
+              <a:t> 로는 ORA-16397 로 실패한다.</a:t>
+            </a:r>
+            <a:r>
+              <a:rPr sz="1600" b="0">
+                <a:solidFill>
+                  <a:srgbClr val="222222"/>
+                </a:solidFill>
+                <a:latin typeface="맑은 고딕"/>
+              </a:rPr>
+              <a:t> 관리자 계정으로 시험하면 기능이 없다고 오판하기 쉽다.</a:t>
             </a:r>
           </a:p>
           <a:p>
@@ -12574,7 +14476,25 @@
                 </a:solidFill>
                 <a:latin typeface="맑은 고딕"/>
               </a:rPr>
-              <a:t>•  리다이렉션의 가치는 부하 분산이 아니라 **접속 단순화**다. 실행은 Primary 에서 일어난다.</a:t>
+              <a:t>•  리다이렉션의 가치는 부하 분산이 아니라 </a:t>
+            </a:r>
+            <a:r>
+              <a:rPr sz="1600" b="1">
+                <a:solidFill>
+                  <a:srgbClr val="222222"/>
+                </a:solidFill>
+                <a:latin typeface="맑은 고딕"/>
+              </a:rPr>
+              <a:t>접속 단순화</a:t>
+            </a:r>
+            <a:r>
+              <a:rPr sz="1600" b="0">
+                <a:solidFill>
+                  <a:srgbClr val="222222"/>
+                </a:solidFill>
+                <a:latin typeface="맑은 고딕"/>
+              </a:rPr>
+              <a:t>다. 실행은 Primary 에서 일어난다.</a:t>
             </a:r>
           </a:p>
           <a:p>
@@ -12590,7 +14510,44 @@
                 </a:solidFill>
                 <a:latin typeface="맑은 고딕"/>
               </a:rPr>
-              <a:t>•  `STANDBY_MAX_DATA_DELAY` 초과 시 **ORA-03172**. ASYNC 에서 0은 항상 위반된다.</a:t>
+              <a:t>•  </a:t>
+            </a:r>
+            <a:r>
+              <a:rPr sz="1600" b="0">
+                <a:solidFill>
+                  <a:srgbClr val="222222"/>
+                </a:solidFill>
+                <a:latin typeface="Consolas"/>
+                <a:cs typeface="Consolas"/>
+              </a:rPr>
+              <a:t>STANDBY_MAX_DATA_DELAY</a:t>
+            </a:r>
+            <a:r>
+              <a:rPr sz="1600" b="0">
+                <a:solidFill>
+                  <a:srgbClr val="222222"/>
+                </a:solidFill>
+                <a:latin typeface="맑은 고딕"/>
+              </a:rPr>
+              <a:t> 초과 시 </a:t>
+            </a:r>
+            <a:r>
+              <a:rPr sz="1600" b="1">
+                <a:solidFill>
+                  <a:srgbClr val="222222"/>
+                </a:solidFill>
+                <a:latin typeface="맑은 고딕"/>
+              </a:rPr>
+              <a:t>ORA-03172</a:t>
+            </a:r>
+            <a:r>
+              <a:rPr sz="1600" b="0">
+                <a:solidFill>
+                  <a:srgbClr val="222222"/>
+                </a:solidFill>
+                <a:latin typeface="맑은 고딕"/>
+              </a:rPr>
+              <a:t>. ASYNC 에서 0은 항상 위반된다.</a:t>
             </a:r>
           </a:p>
           <a:p>
@@ -12606,7 +14563,35 @@
                 </a:solidFill>
                 <a:latin typeface="맑은 고딕"/>
               </a:rPr>
-              <a:t>•  **`SYS` 세션에는 적용되지 않는다 — ORA-03174.** ADG 세션 기능은 일반 사용자를 전제로 한다.</a:t>
+              <a:t>•  </a:t>
+            </a:r>
+            <a:r>
+              <a:rPr sz="1600" b="1">
+                <a:solidFill>
+                  <a:srgbClr val="222222"/>
+                </a:solidFill>
+                <a:latin typeface="Consolas"/>
+                <a:cs typeface="Consolas"/>
+              </a:rPr>
+              <a:t>SYS</a:t>
+            </a:r>
+            <a:r>
+              <a:rPr sz="1600" b="1">
+                <a:solidFill>
+                  <a:srgbClr val="222222"/>
+                </a:solidFill>
+                <a:latin typeface="맑은 고딕"/>
+              </a:rPr>
+              <a:t> 세션에는 적용되지 않는다 — ORA-03174.</a:t>
+            </a:r>
+            <a:r>
+              <a:rPr sz="1600" b="0">
+                <a:solidFill>
+                  <a:srgbClr val="222222"/>
+                </a:solidFill>
+                <a:latin typeface="맑은 고딕"/>
+              </a:rPr>
+              <a:t> ADG 세션 기능은 일반 사용자를 전제로 한다.</a:t>
             </a:r>
           </a:p>
           <a:p>
@@ -12622,7 +14607,44 @@
                 </a:solidFill>
                 <a:latin typeface="맑은 고딕"/>
               </a:rPr>
-              <a:t>•  `SYNC WITH PRIMARY` 는 동기 전송이 전제다. ASYNC 에서는 **ORA-03173**.</a:t>
+              <a:t>•  </a:t>
+            </a:r>
+            <a:r>
+              <a:rPr sz="1600" b="0">
+                <a:solidFill>
+                  <a:srgbClr val="222222"/>
+                </a:solidFill>
+                <a:latin typeface="Consolas"/>
+                <a:cs typeface="Consolas"/>
+              </a:rPr>
+              <a:t>SYNC WITH PRIMARY</a:t>
+            </a:r>
+            <a:r>
+              <a:rPr sz="1600" b="0">
+                <a:solidFill>
+                  <a:srgbClr val="222222"/>
+                </a:solidFill>
+                <a:latin typeface="맑은 고딕"/>
+              </a:rPr>
+              <a:t> 는 동기 전송이 전제다. ASYNC 에서는 </a:t>
+            </a:r>
+            <a:r>
+              <a:rPr sz="1600" b="1">
+                <a:solidFill>
+                  <a:srgbClr val="222222"/>
+                </a:solidFill>
+                <a:latin typeface="맑은 고딕"/>
+              </a:rPr>
+              <a:t>ORA-03173</a:t>
+            </a:r>
+            <a:r>
+              <a:rPr sz="1600" b="0">
+                <a:solidFill>
+                  <a:srgbClr val="222222"/>
+                </a:solidFill>
+                <a:latin typeface="맑은 고딕"/>
+              </a:rPr>
+              <a:t>.</a:t>
             </a:r>
           </a:p>
           <a:p>
@@ -12654,7 +14676,64 @@
                 </a:solidFill>
                 <a:latin typeface="맑은 고딕"/>
               </a:rPr>
-              <a:t>•  `V$STANDBY_EVENT_HISTOGRAM` 은 `apply lag` 하나만 누적한다. 2분 정지가 `2 minutes` 59회로 남았다.</a:t>
+              <a:t>•  </a:t>
+            </a:r>
+            <a:r>
+              <a:rPr sz="1600" b="0">
+                <a:solidFill>
+                  <a:srgbClr val="222222"/>
+                </a:solidFill>
+                <a:latin typeface="Consolas"/>
+                <a:cs typeface="Consolas"/>
+              </a:rPr>
+              <a:t>V$STANDBY_EVENT_HISTOGRAM</a:t>
+            </a:r>
+            <a:r>
+              <a:rPr sz="1600" b="0">
+                <a:solidFill>
+                  <a:srgbClr val="222222"/>
+                </a:solidFill>
+                <a:latin typeface="맑은 고딕"/>
+              </a:rPr>
+              <a:t> 은 </a:t>
+            </a:r>
+            <a:r>
+              <a:rPr sz="1600" b="0">
+                <a:solidFill>
+                  <a:srgbClr val="222222"/>
+                </a:solidFill>
+                <a:latin typeface="Consolas"/>
+                <a:cs typeface="Consolas"/>
+              </a:rPr>
+              <a:t>apply lag</a:t>
+            </a:r>
+            <a:r>
+              <a:rPr sz="1600" b="0">
+                <a:solidFill>
+                  <a:srgbClr val="222222"/>
+                </a:solidFill>
+                <a:latin typeface="맑은 고딕"/>
+              </a:rPr>
+              <a:t> 하나만 누적한다. 2분 정지가 </a:t>
+            </a:r>
+            <a:r>
+              <a:rPr sz="1600" b="0">
+                <a:solidFill>
+                  <a:srgbClr val="222222"/>
+                </a:solidFill>
+                <a:latin typeface="Consolas"/>
+                <a:cs typeface="Consolas"/>
+              </a:rPr>
+              <a:t>2 minutes</a:t>
+            </a:r>
+            <a:r>
+              <a:rPr sz="1600" b="0">
+                <a:solidFill>
+                  <a:srgbClr val="222222"/>
+                </a:solidFill>
+                <a:latin typeface="맑은 고딕"/>
+              </a:rPr>
+              <a:t> 59회로 남았다.</a:t>
             </a:r>
           </a:p>
           <a:p>
@@ -12670,7 +14749,25 @@
                 </a:solidFill>
                 <a:latin typeface="맑은 고딕"/>
               </a:rPr>
-              <a:t>•  옵션 없이 쓰려면 MOUNTED 로 둔다. 적용은 돌고 조회만 **ORA-01219** 로 막힌다.</a:t>
+              <a:t>•  옵션 없이 쓰려면 MOUNTED 로 둔다. 적용은 돌고 조회만 </a:t>
+            </a:r>
+            <a:r>
+              <a:rPr sz="1600" b="1">
+                <a:solidFill>
+                  <a:srgbClr val="222222"/>
+                </a:solidFill>
+                <a:latin typeface="맑은 고딕"/>
+              </a:rPr>
+              <a:t>ORA-01219</a:t>
+            </a:r>
+            <a:r>
+              <a:rPr sz="1600" b="0">
+                <a:solidFill>
+                  <a:srgbClr val="222222"/>
+                </a:solidFill>
+                <a:latin typeface="맑은 고딕"/>
+              </a:rPr>
+              <a:t> 로 막힌다.</a:t>
             </a:r>
           </a:p>
           <a:p>
@@ -12686,7 +14783,64 @@
                 </a:solidFill>
                 <a:latin typeface="맑은 고딕"/>
               </a:rPr>
-              <a:t>•  Primary 쪽 표식은 `DATABASE_MODE` 와 `RECOVERY_MODE` 의 **`WITH QUERY`** 유무다.</a:t>
+              <a:t>•  Primary 쪽 표식은 </a:t>
+            </a:r>
+            <a:r>
+              <a:rPr sz="1600" b="0">
+                <a:solidFill>
+                  <a:srgbClr val="222222"/>
+                </a:solidFill>
+                <a:latin typeface="Consolas"/>
+                <a:cs typeface="Consolas"/>
+              </a:rPr>
+              <a:t>DATABASE_MODE</a:t>
+            </a:r>
+            <a:r>
+              <a:rPr sz="1600" b="0">
+                <a:solidFill>
+                  <a:srgbClr val="222222"/>
+                </a:solidFill>
+                <a:latin typeface="맑은 고딕"/>
+              </a:rPr>
+              <a:t> 와 </a:t>
+            </a:r>
+            <a:r>
+              <a:rPr sz="1600" b="0">
+                <a:solidFill>
+                  <a:srgbClr val="222222"/>
+                </a:solidFill>
+                <a:latin typeface="Consolas"/>
+                <a:cs typeface="Consolas"/>
+              </a:rPr>
+              <a:t>RECOVERY_MODE</a:t>
+            </a:r>
+            <a:r>
+              <a:rPr sz="1600" b="0">
+                <a:solidFill>
+                  <a:srgbClr val="222222"/>
+                </a:solidFill>
+                <a:latin typeface="맑은 고딕"/>
+              </a:rPr>
+              <a:t> 의 </a:t>
+            </a:r>
+            <a:r>
+              <a:rPr sz="1600" b="1">
+                <a:solidFill>
+                  <a:srgbClr val="222222"/>
+                </a:solidFill>
+                <a:latin typeface="Consolas"/>
+                <a:cs typeface="Consolas"/>
+              </a:rPr>
+              <a:t>WITH QUERY</a:t>
+            </a:r>
+            <a:r>
+              <a:rPr sz="1600" b="0">
+                <a:solidFill>
+                  <a:srgbClr val="222222"/>
+                </a:solidFill>
+                <a:latin typeface="맑은 고딕"/>
+              </a:rPr>
+              <a:t> 유무다.</a:t>
             </a:r>
           </a:p>
         </p:txBody>
@@ -12890,7 +15044,26 @@
                 </a:solidFill>
                 <a:latin typeface="맑은 고딕"/>
               </a:rPr>
-              <a:t>•  실습 05 — 리다이렉션의 제약: `SYS` 의 ORA-16397 과 DDL 의 ORA-16000 을 구분하고 점검표를 만든다.</a:t>
+              <a:t>•  실습 05 — 리다이렉션의 제약: </a:t>
+            </a:r>
+            <a:r>
+              <a:rPr sz="1600" b="0">
+                <a:solidFill>
+                  <a:srgbClr val="222222"/>
+                </a:solidFill>
+                <a:latin typeface="Consolas"/>
+                <a:cs typeface="Consolas"/>
+              </a:rPr>
+              <a:t>SYS</a:t>
+            </a:r>
+            <a:r>
+              <a:rPr sz="1600" b="0">
+                <a:solidFill>
+                  <a:srgbClr val="222222"/>
+                </a:solidFill>
+                <a:latin typeface="맑은 고딕"/>
+              </a:rPr>
+              <a:t> 의 ORA-16397 과 DDL 의 ORA-16000 을 구분하고 점검표를 만든다.</a:t>
             </a:r>
           </a:p>
           <a:p>
@@ -12938,7 +15111,26 @@
                 </a:solidFill>
                 <a:latin typeface="맑은 고딕"/>
               </a:rPr>
-              <a:t>•  실습 08 — 옵션 없는 대안 경로: MOUNTED 로 내려 `ORA-01219` 를 재현하고 양쪽에서 동기화를 확인한다.</a:t>
+              <a:t>•  실습 08 — 옵션 없는 대안 경로: MOUNTED 로 내려 </a:t>
+            </a:r>
+            <a:r>
+              <a:rPr sz="1600" b="0">
+                <a:solidFill>
+                  <a:srgbClr val="222222"/>
+                </a:solidFill>
+                <a:latin typeface="Consolas"/>
+                <a:cs typeface="Consolas"/>
+              </a:rPr>
+              <a:t>ORA-01219</a:t>
+            </a:r>
+            <a:r>
+              <a:rPr sz="1600" b="0">
+                <a:solidFill>
+                  <a:srgbClr val="222222"/>
+                </a:solidFill>
+                <a:latin typeface="맑은 고딕"/>
+              </a:rPr>
+              <a:t> 를 재현하고 양쪽에서 동기화를 확인한다.</a:t>
             </a:r>
           </a:p>
           <a:p>
@@ -13388,7 +15580,35 @@
                 </a:solidFill>
                 <a:latin typeface="맑은 고딕"/>
               </a:rPr>
-              <a:t>•  `OPEN_MODE` = **READ ONLY WITH APPLY**</a:t>
+              <a:t>•  </a:t>
+            </a:r>
+            <a:r>
+              <a:rPr sz="1700" b="0">
+                <a:solidFill>
+                  <a:srgbClr val="222222"/>
+                </a:solidFill>
+                <a:latin typeface="Consolas"/>
+                <a:cs typeface="Consolas"/>
+              </a:rPr>
+              <a:t>OPEN_MODE</a:t>
+            </a:r>
+            <a:r>
+              <a:rPr sz="1700" b="0">
+                <a:solidFill>
+                  <a:srgbClr val="222222"/>
+                </a:solidFill>
+                <a:latin typeface="맑은 고딕"/>
+              </a:rPr>
+              <a:t> = </a:t>
+            </a:r>
+            <a:r>
+              <a:rPr sz="1700" b="1">
+                <a:solidFill>
+                  <a:srgbClr val="222222"/>
+                </a:solidFill>
+                <a:latin typeface="맑은 고딕"/>
+              </a:rPr>
+              <a:t>READ ONLY WITH APPLY</a:t>
             </a:r>
           </a:p>
           <a:p>
@@ -13404,7 +15624,35 @@
                 </a:solidFill>
                 <a:latin typeface="맑은 고딕"/>
               </a:rPr>
-              <a:t>•  `RECOVERY_MODE` = **MANAGED REAL TIME APPLY**</a:t>
+              <a:t>•  </a:t>
+            </a:r>
+            <a:r>
+              <a:rPr sz="1700" b="0">
+                <a:solidFill>
+                  <a:srgbClr val="222222"/>
+                </a:solidFill>
+                <a:latin typeface="Consolas"/>
+                <a:cs typeface="Consolas"/>
+              </a:rPr>
+              <a:t>RECOVERY_MODE</a:t>
+            </a:r>
+            <a:r>
+              <a:rPr sz="1700" b="0">
+                <a:solidFill>
+                  <a:srgbClr val="222222"/>
+                </a:solidFill>
+                <a:latin typeface="맑은 고딕"/>
+              </a:rPr>
+              <a:t> = </a:t>
+            </a:r>
+            <a:r>
+              <a:rPr sz="1700" b="1">
+                <a:solidFill>
+                  <a:srgbClr val="222222"/>
+                </a:solidFill>
+                <a:latin typeface="맑은 고딕"/>
+              </a:rPr>
+              <a:t>MANAGED REAL TIME APPLY</a:t>
             </a:r>
           </a:p>
           <a:p>
@@ -13420,7 +15668,26 @@
                 </a:solidFill>
                 <a:latin typeface="맑은 고딕"/>
               </a:rPr>
-              <a:t>•  두 번째는 목적지 `STATUS` 가 VALID 일 때만 의미가 있다</a:t>
+              <a:t>•  두 번째는 목적지 </a:t>
+            </a:r>
+            <a:r>
+              <a:rPr sz="1700" b="0">
+                <a:solidFill>
+                  <a:srgbClr val="222222"/>
+                </a:solidFill>
+                <a:latin typeface="Consolas"/>
+                <a:cs typeface="Consolas"/>
+              </a:rPr>
+              <a:t>STATUS</a:t>
+            </a:r>
+            <a:r>
+              <a:rPr sz="1700" b="0">
+                <a:solidFill>
+                  <a:srgbClr val="222222"/>
+                </a:solidFill>
+                <a:latin typeface="맑은 고딕"/>
+              </a:rPr>
+              <a:t> 가 VALID 일 때만 의미가 있다</a:t>
             </a:r>
           </a:p>
           <a:p>
@@ -13615,7 +15882,35 @@
                 </a:solidFill>
                 <a:latin typeface="맑은 고딕"/>
               </a:rPr>
-              <a:t>•  `DBA_FEATURE_USAGE_STATISTICS` → **no rows selected**</a:t>
+              <a:t>•  </a:t>
+            </a:r>
+            <a:r>
+              <a:rPr sz="1700" b="0">
+                <a:solidFill>
+                  <a:srgbClr val="222222"/>
+                </a:solidFill>
+                <a:latin typeface="Consolas"/>
+                <a:cs typeface="Consolas"/>
+              </a:rPr>
+              <a:t>DBA_FEATURE_USAGE_STATISTICS</a:t>
+            </a:r>
+            <a:r>
+              <a:rPr sz="1700" b="0">
+                <a:solidFill>
+                  <a:srgbClr val="222222"/>
+                </a:solidFill>
+                <a:latin typeface="맑은 고딕"/>
+              </a:rPr>
+              <a:t> → </a:t>
+            </a:r>
+            <a:r>
+              <a:rPr sz="1700" b="1">
+                <a:solidFill>
+                  <a:srgbClr val="222222"/>
+                </a:solidFill>
+                <a:latin typeface="맑은 고딕"/>
+              </a:rPr>
+              <a:t>no rows selected</a:t>
             </a:r>
           </a:p>
           <a:p>
@@ -13631,7 +15926,26 @@
                 </a:solidFill>
                 <a:latin typeface="맑은 고딕"/>
               </a:rPr>
-              <a:t>•  `CDB_FEATURE_USAGE_STATISTICS` CON_ID 3 에 두 항목</a:t>
+              <a:t>•  </a:t>
+            </a:r>
+            <a:r>
+              <a:rPr sz="1700" b="0">
+                <a:solidFill>
+                  <a:srgbClr val="222222"/>
+                </a:solidFill>
+                <a:latin typeface="Consolas"/>
+                <a:cs typeface="Consolas"/>
+              </a:rPr>
+              <a:t>CDB_FEATURE_USAGE_STATISTICS</a:t>
+            </a:r>
+            <a:r>
+              <a:rPr sz="1700" b="0">
+                <a:solidFill>
+                  <a:srgbClr val="222222"/>
+                </a:solidFill>
+                <a:latin typeface="맑은 고딕"/>
+              </a:rPr>
+              <a:t> CON_ID 3 에 두 항목</a:t>
             </a:r>
           </a:p>
           <a:p>
@@ -13647,7 +15961,35 @@
                 </a:solidFill>
                 <a:latin typeface="맑은 고딕"/>
               </a:rPr>
-              <a:t>•  그런데 `DETECTED_USAGES` 가 **0**</a:t>
+              <a:t>•  그런데 </a:t>
+            </a:r>
+            <a:r>
+              <a:rPr sz="1700" b="0">
+                <a:solidFill>
+                  <a:srgbClr val="222222"/>
+                </a:solidFill>
+                <a:latin typeface="Consolas"/>
+                <a:cs typeface="Consolas"/>
+              </a:rPr>
+              <a:t>DETECTED_USAGES</a:t>
+            </a:r>
+            <a:r>
+              <a:rPr sz="1700" b="0">
+                <a:solidFill>
+                  <a:srgbClr val="222222"/>
+                </a:solidFill>
+                <a:latin typeface="맑은 고딕"/>
+              </a:rPr>
+              <a:t> 가 </a:t>
+            </a:r>
+            <a:r>
+              <a:rPr sz="1700" b="1">
+                <a:solidFill>
+                  <a:srgbClr val="222222"/>
+                </a:solidFill>
+                <a:latin typeface="맑은 고딕"/>
+              </a:rPr>
+              <a:t>0</a:t>
             </a:r>
           </a:p>
           <a:p>
@@ -13663,7 +16005,26 @@
                 </a:solidFill>
                 <a:latin typeface="맑은 고딕"/>
               </a:rPr>
-              <a:t>•  라이선스 판단은 `OPEN_MODE` 로 하는 편이 정확하다</a:t>
+              <a:t>•  라이선스 판단은 </a:t>
+            </a:r>
+            <a:r>
+              <a:rPr sz="1700" b="0">
+                <a:solidFill>
+                  <a:srgbClr val="222222"/>
+                </a:solidFill>
+                <a:latin typeface="Consolas"/>
+                <a:cs typeface="Consolas"/>
+              </a:rPr>
+              <a:t>OPEN_MODE</a:t>
+            </a:r>
+            <a:r>
+              <a:rPr sz="1700" b="0">
+                <a:solidFill>
+                  <a:srgbClr val="222222"/>
+                </a:solidFill>
+                <a:latin typeface="맑은 고딕"/>
+              </a:rPr>
+              <a:t> 로 하는 편이 정확하다</a:t>
             </a:r>
           </a:p>
         </p:txBody>
@@ -13842,7 +16203,26 @@
                 </a:solidFill>
                 <a:latin typeface="맑은 고딕"/>
               </a:rPr>
-              <a:t>•  `SYS_CONTEXT('userenv','db_unique_name')` → boston</a:t>
+              <a:t>•  </a:t>
+            </a:r>
+            <a:r>
+              <a:rPr sz="1700" b="0">
+                <a:solidFill>
+                  <a:srgbClr val="222222"/>
+                </a:solidFill>
+                <a:latin typeface="Consolas"/>
+                <a:cs typeface="Consolas"/>
+              </a:rPr>
+              <a:t>SYS_CONTEXT('userenv','db_unique_name')</a:t>
+            </a:r>
+            <a:r>
+              <a:rPr sz="1700" b="0">
+                <a:solidFill>
+                  <a:srgbClr val="222222"/>
+                </a:solidFill>
+                <a:latin typeface="맑은 고딕"/>
+              </a:rPr>
+              <a:t> → boston</a:t>
             </a:r>
           </a:p>
           <a:p>
@@ -13858,7 +16238,26 @@
                 </a:solidFill>
                 <a:latin typeface="맑은 고딕"/>
               </a:rPr>
-              <a:t>•  `SYS_CONTEXT('userenv','database_role')` → PHYSICAL STANDBY</a:t>
+              <a:t>•  </a:t>
+            </a:r>
+            <a:r>
+              <a:rPr sz="1700" b="0">
+                <a:solidFill>
+                  <a:srgbClr val="222222"/>
+                </a:solidFill>
+                <a:latin typeface="Consolas"/>
+                <a:cs typeface="Consolas"/>
+              </a:rPr>
+              <a:t>SYS_CONTEXT('userenv','database_role')</a:t>
+            </a:r>
+            <a:r>
+              <a:rPr sz="1700" b="0">
+                <a:solidFill>
+                  <a:srgbClr val="222222"/>
+                </a:solidFill>
+                <a:latin typeface="맑은 고딕"/>
+              </a:rPr>
+              <a:t> → PHYSICAL STANDBY</a:t>
             </a:r>
           </a:p>
           <a:p>
@@ -13874,7 +16273,25 @@
                 </a:solidFill>
                 <a:latin typeface="맑은 고딕"/>
               </a:rPr>
-              <a:t>•  역할 전환 환경에서는 **역할로 판단**해야 한다</a:t>
+              <a:t>•  역할 전환 환경에서는 </a:t>
+            </a:r>
+            <a:r>
+              <a:rPr sz="1700" b="1">
+                <a:solidFill>
+                  <a:srgbClr val="222222"/>
+                </a:solidFill>
+                <a:latin typeface="맑은 고딕"/>
+              </a:rPr>
+              <a:t>역할로 판단</a:t>
+            </a:r>
+            <a:r>
+              <a:rPr sz="1700" b="0">
+                <a:solidFill>
+                  <a:srgbClr val="222222"/>
+                </a:solidFill>
+                <a:latin typeface="맑은 고딕"/>
+              </a:rPr>
+              <a:t>해야 한다</a:t>
             </a:r>
           </a:p>
           <a:p>
@@ -14324,7 +16741,25 @@
                 </a:solidFill>
                 <a:latin typeface="맑은 고딕"/>
               </a:rPr>
-              <a:t>•  그 사이 Standby 조회 → **커밋된 1건만** 보인다</a:t>
+              <a:t>•  그 사이 Standby 조회 → </a:t>
+            </a:r>
+            <a:r>
+              <a:rPr sz="1700" b="1">
+                <a:solidFill>
+                  <a:srgbClr val="222222"/>
+                </a:solidFill>
+                <a:latin typeface="맑은 고딕"/>
+              </a:rPr>
+              <a:t>커밋된 1건만</a:t>
+            </a:r>
+            <a:r>
+              <a:rPr sz="1700" b="0">
+                <a:solidFill>
+                  <a:srgbClr val="222222"/>
+                </a:solidFill>
+                <a:latin typeface="맑은 고딕"/>
+              </a:rPr>
+              <a:t> 보인다</a:t>
             </a:r>
           </a:p>
           <a:p>
@@ -14356,7 +16791,25 @@
                 </a:solidFill>
                 <a:latin typeface="맑은 고딕"/>
               </a:rPr>
-              <a:t>•  리두와 함께 **UNDO 도 적용**되어 일관성이 유지된다</a:t>
+              <a:t>•  리두와 함께 </a:t>
+            </a:r>
+            <a:r>
+              <a:rPr sz="1700" b="1">
+                <a:solidFill>
+                  <a:srgbClr val="222222"/>
+                </a:solidFill>
+                <a:latin typeface="맑은 고딕"/>
+              </a:rPr>
+              <a:t>UNDO 도 적용</a:t>
+            </a:r>
+            <a:r>
+              <a:rPr sz="1700" b="0">
+                <a:solidFill>
+                  <a:srgbClr val="222222"/>
+                </a:solidFill>
+                <a:latin typeface="맑은 고딕"/>
+              </a:rPr>
+              <a:t>되어 일관성이 유지된다</a:t>
             </a:r>
           </a:p>
         </p:txBody>
